--- a/services/drawing-similarity-api/docs/onboarding/類似図面検索_モニターご説明資料.pptx
+++ b/services/drawing-similarity-api/docs/onboarding/類似図面検索_モニターご説明資料.pptx
@@ -2867,9 +2867,9 @@
                 <a:solidFill>
                   <a:srgbClr val="FFFFFF"/>
                 </a:solidFill>
-                <a:latin typeface="Yu Gothic" pitchFamily="34" charset="0"/>
-                <a:ea typeface="Yu Gothic" pitchFamily="34" charset="-122"/>
-                <a:cs typeface="Yu Gothic" pitchFamily="34" charset="-120"/>
+                <a:latin typeface="Noto Sans JP" pitchFamily="34" charset="0"/>
+                <a:ea typeface="Noto Sans JP" pitchFamily="34" charset="-122"/>
+                <a:cs typeface="Noto Sans JP" pitchFamily="34" charset="-120"/>
               </a:rPr>
               <a:t>類似図面検索 for kintone</a:t>
             </a:r>
@@ -2906,9 +2906,9 @@
                 <a:solidFill>
                   <a:srgbClr val="CADCFC"/>
                 </a:solidFill>
-                <a:latin typeface="Yu Gothic" pitchFamily="34" charset="0"/>
-                <a:ea typeface="Yu Gothic" pitchFamily="34" charset="-122"/>
-                <a:cs typeface="Yu Gothic" pitchFamily="34" charset="-120"/>
+                <a:latin typeface="Noto Sans JP" pitchFamily="34" charset="0"/>
+                <a:ea typeface="Noto Sans JP" pitchFamily="34" charset="-122"/>
+                <a:cs typeface="Noto Sans JP" pitchFamily="34" charset="-120"/>
               </a:rPr>
               <a:t>モニター導入のご案内</a:t>
             </a:r>
@@ -2968,9 +2968,9 @@
                 <a:solidFill>
                   <a:srgbClr val="CADCFC"/>
                 </a:solidFill>
-                <a:latin typeface="Yu Gothic" pitchFamily="34" charset="0"/>
-                <a:ea typeface="Yu Gothic" pitchFamily="34" charset="-122"/>
-                <a:cs typeface="Yu Gothic" pitchFamily="34" charset="-120"/>
+                <a:latin typeface="Noto Sans JP" pitchFamily="34" charset="0"/>
+                <a:ea typeface="Noto Sans JP" pitchFamily="34" charset="-122"/>
+                <a:cs typeface="Noto Sans JP" pitchFamily="34" charset="-120"/>
               </a:rPr>
               <a:t>PlugBits ／ 2026年7月</a:t>
             </a:r>
@@ -3039,9 +3039,9 @@
                 <a:solidFill>
                   <a:srgbClr val="1E2761"/>
                 </a:solidFill>
-                <a:latin typeface="Yu Gothic" pitchFamily="34" charset="0"/>
-                <a:ea typeface="Yu Gothic" pitchFamily="34" charset="-122"/>
-                <a:cs typeface="Yu Gothic" pitchFamily="34" charset="-120"/>
+                <a:latin typeface="Noto Sans JP" pitchFamily="34" charset="0"/>
+                <a:ea typeface="Noto Sans JP" pitchFamily="34" charset="-122"/>
+                <a:cs typeface="Noto Sans JP" pitchFamily="34" charset="-120"/>
               </a:rPr>
               <a:t>仕組み：どうやって似た図面を見つけているか</a:t>
             </a:r>
@@ -3100,9 +3100,9 @@
                 <a:solidFill>
                   <a:srgbClr val="1E2761"/>
                 </a:solidFill>
-                <a:latin typeface="Yu Gothic" pitchFamily="34" charset="0"/>
-                <a:ea typeface="Yu Gothic" pitchFamily="34" charset="-122"/>
-                <a:cs typeface="Yu Gothic" pitchFamily="34" charset="-120"/>
+                <a:latin typeface="Noto Sans JP" pitchFamily="34" charset="0"/>
+                <a:ea typeface="Noto Sans JP" pitchFamily="34" charset="-122"/>
+                <a:cs typeface="Noto Sans JP" pitchFamily="34" charset="-120"/>
               </a:rPr>
               <a:t>kintone</a:t>
             </a:r>
@@ -3139,9 +3139,9 @@
                 <a:solidFill>
                   <a:srgbClr val="1E2761"/>
                 </a:solidFill>
-                <a:latin typeface="Yu Gothic" pitchFamily="34" charset="0"/>
-                <a:ea typeface="Yu Gothic" pitchFamily="34" charset="-122"/>
-                <a:cs typeface="Yu Gothic" pitchFamily="34" charset="-120"/>
+                <a:latin typeface="Noto Sans JP" pitchFamily="34" charset="0"/>
+                <a:ea typeface="Noto Sans JP" pitchFamily="34" charset="-122"/>
+                <a:cs typeface="Noto Sans JP" pitchFamily="34" charset="-120"/>
               </a:rPr>
               <a:t>（貴社の図面台帳）</a:t>
             </a:r>
@@ -3200,9 +3200,9 @@
                 <a:solidFill>
                   <a:srgbClr val="FFFFFF"/>
                 </a:solidFill>
-                <a:latin typeface="Yu Gothic" pitchFamily="34" charset="0"/>
-                <a:ea typeface="Yu Gothic" pitchFamily="34" charset="-122"/>
-                <a:cs typeface="Yu Gothic" pitchFamily="34" charset="-120"/>
+                <a:latin typeface="Noto Sans JP" pitchFamily="34" charset="0"/>
+                <a:ea typeface="Noto Sans JP" pitchFamily="34" charset="-122"/>
+                <a:cs typeface="Noto Sans JP" pitchFamily="34" charset="-120"/>
               </a:rPr>
               <a:t>類似検索AI</a:t>
             </a:r>
@@ -3239,9 +3239,9 @@
                 <a:solidFill>
                   <a:srgbClr val="FFFFFF"/>
                 </a:solidFill>
-                <a:latin typeface="Yu Gothic" pitchFamily="34" charset="0"/>
-                <a:ea typeface="Yu Gothic" pitchFamily="34" charset="-122"/>
-                <a:cs typeface="Yu Gothic" pitchFamily="34" charset="-120"/>
+                <a:latin typeface="Noto Sans JP" pitchFamily="34" charset="0"/>
+                <a:ea typeface="Noto Sans JP" pitchFamily="34" charset="-122"/>
+                <a:cs typeface="Noto Sans JP" pitchFamily="34" charset="-120"/>
               </a:rPr>
               <a:t>（クラウド）</a:t>
             </a:r>
@@ -3300,9 +3300,9 @@
                 <a:solidFill>
                   <a:srgbClr val="1E2761"/>
                 </a:solidFill>
-                <a:latin typeface="Yu Gothic" pitchFamily="34" charset="0"/>
-                <a:ea typeface="Yu Gothic" pitchFamily="34" charset="-122"/>
-                <a:cs typeface="Yu Gothic" pitchFamily="34" charset="-120"/>
+                <a:latin typeface="Noto Sans JP" pitchFamily="34" charset="0"/>
+                <a:ea typeface="Noto Sans JP" pitchFamily="34" charset="-122"/>
+                <a:cs typeface="Noto Sans JP" pitchFamily="34" charset="-120"/>
               </a:rPr>
               <a:t>検索結果</a:t>
             </a:r>
@@ -3339,9 +3339,9 @@
                 <a:solidFill>
                   <a:srgbClr val="1E2761"/>
                 </a:solidFill>
-                <a:latin typeface="Yu Gothic" pitchFamily="34" charset="0"/>
-                <a:ea typeface="Yu Gothic" pitchFamily="34" charset="-122"/>
-                <a:cs typeface="Yu Gothic" pitchFamily="34" charset="-120"/>
+                <a:latin typeface="Noto Sans JP" pitchFamily="34" charset="0"/>
+                <a:ea typeface="Noto Sans JP" pitchFamily="34" charset="-122"/>
+                <a:cs typeface="Noto Sans JP" pitchFamily="34" charset="-120"/>
               </a:rPr>
               <a:t>スコア順に表示</a:t>
             </a:r>
@@ -3516,9 +3516,9 @@
                 <a:solidFill>
                   <a:srgbClr val="1E2761"/>
                 </a:solidFill>
-                <a:latin typeface="Yu Gothic" pitchFamily="34" charset="0"/>
-                <a:ea typeface="Yu Gothic" pitchFamily="34" charset="-122"/>
-                <a:cs typeface="Yu Gothic" pitchFamily="34" charset="-120"/>
+                <a:latin typeface="Noto Sans JP" pitchFamily="34" charset="0"/>
+                <a:ea typeface="Noto Sans JP" pitchFamily="34" charset="-122"/>
+                <a:cs typeface="Noto Sans JP" pitchFamily="34" charset="-120"/>
               </a:rPr>
               <a:t>画像の特徴</a:t>
             </a:r>
@@ -3621,9 +3621,9 @@
                 <a:solidFill>
                   <a:srgbClr val="1E2761"/>
                 </a:solidFill>
-                <a:latin typeface="Yu Gothic" pitchFamily="34" charset="0"/>
-                <a:ea typeface="Yu Gothic" pitchFamily="34" charset="-122"/>
-                <a:cs typeface="Yu Gothic" pitchFamily="34" charset="-120"/>
+                <a:latin typeface="Noto Sans JP" pitchFamily="34" charset="0"/>
+                <a:ea typeface="Noto Sans JP" pitchFamily="34" charset="-122"/>
+                <a:cs typeface="Noto Sans JP" pitchFamily="34" charset="-120"/>
               </a:rPr>
               <a:t>文字情報（OCR）</a:t>
             </a:r>
@@ -3726,9 +3726,9 @@
                 <a:solidFill>
                   <a:srgbClr val="1E2761"/>
                 </a:solidFill>
-                <a:latin typeface="Yu Gothic" pitchFamily="34" charset="0"/>
-                <a:ea typeface="Yu Gothic" pitchFamily="34" charset="-122"/>
-                <a:cs typeface="Yu Gothic" pitchFamily="34" charset="-120"/>
+                <a:latin typeface="Noto Sans JP" pitchFamily="34" charset="0"/>
+                <a:ea typeface="Noto Sans JP" pitchFamily="34" charset="-122"/>
+                <a:cs typeface="Noto Sans JP" pitchFamily="34" charset="-120"/>
               </a:rPr>
               <a:t>外形形状</a:t>
             </a:r>
@@ -3787,9 +3787,9 @@
                 <a:solidFill>
                   <a:srgbClr val="FFFFFF"/>
                 </a:solidFill>
-                <a:latin typeface="Yu Gothic" pitchFamily="34" charset="0"/>
-                <a:ea typeface="Yu Gothic" pitchFamily="34" charset="-122"/>
-                <a:cs typeface="Yu Gothic" pitchFamily="34" charset="-120"/>
+                <a:latin typeface="Noto Sans JP" pitchFamily="34" charset="0"/>
+                <a:ea typeface="Noto Sans JP" pitchFamily="34" charset="-122"/>
+                <a:cs typeface="Noto Sans JP" pitchFamily="34" charset="-120"/>
               </a:rPr>
               <a:t>3つの観点を組み合わせ、総合スコアで検索結果を返す</a:t>
             </a:r>
@@ -3850,9 +3850,9 @@
                 <a:solidFill>
                   <a:srgbClr val="5A6478"/>
                 </a:solidFill>
-                <a:latin typeface="Yu Gothic" pitchFamily="34" charset="0"/>
-                <a:ea typeface="Yu Gothic" pitchFamily="34" charset="-122"/>
-                <a:cs typeface="Yu Gothic" pitchFamily="34" charset="-120"/>
+                <a:latin typeface="Noto Sans JP" pitchFamily="34" charset="0"/>
+                <a:ea typeface="Noto Sans JP" pitchFamily="34" charset="-122"/>
+                <a:cs typeface="Noto Sans JP" pitchFamily="34" charset="-120"/>
               </a:rPr>
               <a:t>10</a:t>
             </a:r>
@@ -3921,9 +3921,9 @@
                 <a:solidFill>
                   <a:srgbClr val="1E2761"/>
                 </a:solidFill>
-                <a:latin typeface="Yu Gothic" pitchFamily="34" charset="0"/>
-                <a:ea typeface="Yu Gothic" pitchFamily="34" charset="-122"/>
-                <a:cs typeface="Yu Gothic" pitchFamily="34" charset="-120"/>
+                <a:latin typeface="Noto Sans JP" pitchFamily="34" charset="0"/>
+                <a:ea typeface="Noto Sans JP" pitchFamily="34" charset="-122"/>
+                <a:cs typeface="Noto Sans JP" pitchFamily="34" charset="-120"/>
               </a:rPr>
               <a:t>データの取り扱い</a:t>
             </a:r>
@@ -4033,9 +4033,9 @@
                 <a:solidFill>
                   <a:srgbClr val="1E2761"/>
                 </a:solidFill>
-                <a:latin typeface="Yu Gothic" pitchFamily="34" charset="0"/>
-                <a:ea typeface="Yu Gothic" pitchFamily="34" charset="-122"/>
-                <a:cs typeface="Yu Gothic" pitchFamily="34" charset="-120"/>
+                <a:latin typeface="Noto Sans JP" pitchFamily="34" charset="0"/>
+                <a:ea typeface="Noto Sans JP" pitchFamily="34" charset="-122"/>
+                <a:cs typeface="Noto Sans JP" pitchFamily="34" charset="-120"/>
               </a:rPr>
               <a:t>原本は動かしません</a:t>
             </a:r>
@@ -4075,9 +4075,9 @@
                 <a:solidFill>
                   <a:srgbClr val="1A1F36"/>
                 </a:solidFill>
-                <a:latin typeface="Yu Gothic" pitchFamily="34" charset="0"/>
-                <a:ea typeface="Yu Gothic" pitchFamily="34" charset="-122"/>
-                <a:cs typeface="Yu Gothic" pitchFamily="34" charset="-120"/>
+                <a:latin typeface="Noto Sans JP" pitchFamily="34" charset="0"/>
+                <a:ea typeface="Noto Sans JP" pitchFamily="34" charset="-122"/>
+                <a:cs typeface="Noto Sans JP" pitchFamily="34" charset="-120"/>
               </a:rPr>
               <a:t>図面PDFの原本は貴社のkintoneに置いたまま。当方が保持するのは検索用の特徴データと抽出テキストのみです。</a:t>
             </a:r>
@@ -4187,9 +4187,9 @@
                 <a:solidFill>
                   <a:srgbClr val="1E2761"/>
                 </a:solidFill>
-                <a:latin typeface="Yu Gothic" pitchFamily="34" charset="0"/>
-                <a:ea typeface="Yu Gothic" pitchFamily="34" charset="-122"/>
-                <a:cs typeface="Yu Gothic" pitchFamily="34" charset="-120"/>
+                <a:latin typeface="Noto Sans JP" pitchFamily="34" charset="0"/>
+                <a:ea typeface="Noto Sans JP" pitchFamily="34" charset="-122"/>
+                <a:cs typeface="Noto Sans JP" pitchFamily="34" charset="-120"/>
               </a:rPr>
               <a:t>企業ごとに完全分離</a:t>
             </a:r>
@@ -4229,9 +4229,9 @@
                 <a:solidFill>
                   <a:srgbClr val="1A1F36"/>
                 </a:solidFill>
-                <a:latin typeface="Yu Gothic" pitchFamily="34" charset="0"/>
-                <a:ea typeface="Yu Gothic" pitchFamily="34" charset="-122"/>
-                <a:cs typeface="Yu Gothic" pitchFamily="34" charset="-120"/>
+                <a:latin typeface="Noto Sans JP" pitchFamily="34" charset="0"/>
+                <a:ea typeface="Noto Sans JP" pitchFamily="34" charset="-122"/>
+                <a:cs typeface="Noto Sans JP" pitchFamily="34" charset="-120"/>
               </a:rPr>
               <a:t>データは企業単位で完全に分離され、APIキーによる認証で保護されます。</a:t>
             </a:r>
@@ -4341,9 +4341,9 @@
                 <a:solidFill>
                   <a:srgbClr val="1E2761"/>
                 </a:solidFill>
-                <a:latin typeface="Yu Gothic" pitchFamily="34" charset="0"/>
-                <a:ea typeface="Yu Gothic" pitchFamily="34" charset="-122"/>
-                <a:cs typeface="Yu Gothic" pitchFamily="34" charset="-120"/>
+                <a:latin typeface="Noto Sans JP" pitchFamily="34" charset="0"/>
+                <a:ea typeface="Noto Sans JP" pitchFamily="34" charset="-122"/>
+                <a:cs typeface="Noto Sans JP" pitchFamily="34" charset="-120"/>
               </a:rPr>
               <a:t>通信は暗号化</a:t>
             </a:r>
@@ -4383,9 +4383,9 @@
                 <a:solidFill>
                   <a:srgbClr val="1A1F36"/>
                 </a:solidFill>
-                <a:latin typeface="Yu Gothic" pitchFamily="34" charset="0"/>
-                <a:ea typeface="Yu Gothic" pitchFamily="34" charset="-122"/>
-                <a:cs typeface="Yu Gothic" pitchFamily="34" charset="-120"/>
+                <a:latin typeface="Noto Sans JP" pitchFamily="34" charset="0"/>
+                <a:ea typeface="Noto Sans JP" pitchFamily="34" charset="-122"/>
+                <a:cs typeface="Noto Sans JP" pitchFamily="34" charset="-120"/>
               </a:rPr>
               <a:t>全通信はTLSで暗号化。サムネイル画像も署名付きトークンで保護されます。</a:t>
             </a:r>
@@ -4495,9 +4495,9 @@
                 <a:solidFill>
                   <a:srgbClr val="1E2761"/>
                 </a:solidFill>
-                <a:latin typeface="Yu Gothic" pitchFamily="34" charset="0"/>
-                <a:ea typeface="Yu Gothic" pitchFamily="34" charset="-122"/>
-                <a:cs typeface="Yu Gothic" pitchFamily="34" charset="-120"/>
+                <a:latin typeface="Noto Sans JP" pitchFamily="34" charset="0"/>
+                <a:ea typeface="Noto Sans JP" pitchFamily="34" charset="-122"/>
+                <a:cs typeface="Noto Sans JP" pitchFamily="34" charset="-120"/>
               </a:rPr>
               <a:t>認証情報を預かりません</a:t>
             </a:r>
@@ -4537,9 +4537,9 @@
                 <a:solidFill>
                   <a:srgbClr val="1A1F36"/>
                 </a:solidFill>
-                <a:latin typeface="Yu Gothic" pitchFamily="34" charset="0"/>
-                <a:ea typeface="Yu Gothic" pitchFamily="34" charset="-122"/>
-                <a:cs typeface="Yu Gothic" pitchFamily="34" charset="-120"/>
+                <a:latin typeface="Noto Sans JP" pitchFamily="34" charset="0"/>
+                <a:ea typeface="Noto Sans JP" pitchFamily="34" charset="-122"/>
+                <a:cs typeface="Noto Sans JP" pitchFamily="34" charset="-120"/>
               </a:rPr>
               <a:t>kintoneのパスワードやAPIトークンは預かりません。閲覧権限のあるユーザーのブラウザ経由でのみファイルを取得します。</a:t>
             </a:r>
@@ -4576,9 +4576,9 @@
                 <a:solidFill>
                   <a:srgbClr val="5A6478"/>
                 </a:solidFill>
-                <a:latin typeface="Yu Gothic" pitchFamily="34" charset="0"/>
-                <a:ea typeface="Yu Gothic" pitchFamily="34" charset="-122"/>
-                <a:cs typeface="Yu Gothic" pitchFamily="34" charset="-120"/>
+                <a:latin typeface="Noto Sans JP" pitchFamily="34" charset="0"/>
+                <a:ea typeface="Noto Sans JP" pitchFamily="34" charset="-122"/>
+                <a:cs typeface="Noto Sans JP" pitchFamily="34" charset="-120"/>
               </a:rPr>
               <a:t>11</a:t>
             </a:r>
@@ -4647,9 +4647,9 @@
                 <a:solidFill>
                   <a:srgbClr val="1E2761"/>
                 </a:solidFill>
-                <a:latin typeface="Yu Gothic" pitchFamily="34" charset="0"/>
-                <a:ea typeface="Yu Gothic" pitchFamily="34" charset="-122"/>
-                <a:cs typeface="Yu Gothic" pitchFamily="34" charset="-120"/>
+                <a:latin typeface="Noto Sans JP" pitchFamily="34" charset="0"/>
+                <a:ea typeface="Noto Sans JP" pitchFamily="34" charset="-122"/>
+                <a:cs typeface="Noto Sans JP" pitchFamily="34" charset="-120"/>
               </a:rPr>
               <a:t>導入当日の流れ（貴社側 約30分）</a:t>
             </a:r>
@@ -4728,9 +4728,9 @@
                 <a:solidFill>
                   <a:srgbClr val="FFFFFF"/>
                 </a:solidFill>
-                <a:latin typeface="Yu Gothic" pitchFamily="34" charset="0"/>
-                <a:ea typeface="Yu Gothic" pitchFamily="34" charset="-122"/>
-                <a:cs typeface="Yu Gothic" pitchFamily="34" charset="-120"/>
+                <a:latin typeface="Noto Sans JP" pitchFamily="34" charset="0"/>
+                <a:ea typeface="Noto Sans JP" pitchFamily="34" charset="-122"/>
+                <a:cs typeface="Noto Sans JP" pitchFamily="34" charset="-120"/>
               </a:rPr>
               <a:t>1</a:t>
             </a:r>
@@ -4770,9 +4770,9 @@
                 <a:solidFill>
                   <a:srgbClr val="1E2761"/>
                 </a:solidFill>
-                <a:latin typeface="Yu Gothic" pitchFamily="34" charset="0"/>
-                <a:ea typeface="Yu Gothic" pitchFamily="34" charset="-122"/>
-                <a:cs typeface="Yu Gothic" pitchFamily="34" charset="-120"/>
+                <a:latin typeface="Noto Sans JP" pitchFamily="34" charset="0"/>
+                <a:ea typeface="Noto Sans JP" pitchFamily="34" charset="-122"/>
+                <a:cs typeface="Noto Sans JP" pitchFamily="34" charset="-120"/>
               </a:rPr>
               <a:t>プラグイン読み込み</a:t>
             </a:r>
@@ -4809,9 +4809,9 @@
                 <a:solidFill>
                   <a:srgbClr val="E8833A"/>
                 </a:solidFill>
-                <a:latin typeface="Yu Gothic" pitchFamily="34" charset="0"/>
-                <a:ea typeface="Yu Gothic" pitchFamily="34" charset="-122"/>
-                <a:cs typeface="Yu Gothic" pitchFamily="34" charset="-120"/>
+                <a:latin typeface="Noto Sans JP" pitchFamily="34" charset="0"/>
+                <a:ea typeface="Noto Sans JP" pitchFamily="34" charset="-122"/>
+                <a:cs typeface="Noto Sans JP" pitchFamily="34" charset="-120"/>
               </a:rPr>
               <a:t>約5分</a:t>
             </a:r>
@@ -4848,9 +4848,9 @@
                 <a:solidFill>
                   <a:srgbClr val="E8833A"/>
                 </a:solidFill>
-                <a:latin typeface="Yu Gothic" pitchFamily="34" charset="0"/>
-                <a:ea typeface="Yu Gothic" pitchFamily="34" charset="-122"/>
-                <a:cs typeface="Yu Gothic" pitchFamily="34" charset="-120"/>
+                <a:latin typeface="Noto Sans JP" pitchFamily="34" charset="0"/>
+                <a:ea typeface="Noto Sans JP" pitchFamily="34" charset="-122"/>
+                <a:cs typeface="Noto Sans JP" pitchFamily="34" charset="-120"/>
               </a:rPr>
               <a:t>→</a:t>
             </a:r>
@@ -4929,9 +4929,9 @@
                 <a:solidFill>
                   <a:srgbClr val="FFFFFF"/>
                 </a:solidFill>
-                <a:latin typeface="Yu Gothic" pitchFamily="34" charset="0"/>
-                <a:ea typeface="Yu Gothic" pitchFamily="34" charset="-122"/>
-                <a:cs typeface="Yu Gothic" pitchFamily="34" charset="-120"/>
+                <a:latin typeface="Noto Sans JP" pitchFamily="34" charset="0"/>
+                <a:ea typeface="Noto Sans JP" pitchFamily="34" charset="-122"/>
+                <a:cs typeface="Noto Sans JP" pitchFamily="34" charset="-120"/>
               </a:rPr>
               <a:t>2</a:t>
             </a:r>
@@ -4971,9 +4971,9 @@
                 <a:solidFill>
                   <a:srgbClr val="1E2761"/>
                 </a:solidFill>
-                <a:latin typeface="Yu Gothic" pitchFamily="34" charset="0"/>
-                <a:ea typeface="Yu Gothic" pitchFamily="34" charset="-122"/>
-                <a:cs typeface="Yu Gothic" pitchFamily="34" charset="-120"/>
+                <a:latin typeface="Noto Sans JP" pitchFamily="34" charset="0"/>
+                <a:ea typeface="Noto Sans JP" pitchFamily="34" charset="-122"/>
+                <a:cs typeface="Noto Sans JP" pitchFamily="34" charset="-120"/>
               </a:rPr>
               <a:t>アプリ設定・</a:t>
             </a:r>
@@ -4991,9 +4991,9 @@
                 <a:solidFill>
                   <a:srgbClr val="1E2761"/>
                 </a:solidFill>
-                <a:latin typeface="Yu Gothic" pitchFamily="34" charset="0"/>
-                <a:ea typeface="Yu Gothic" pitchFamily="34" charset="-122"/>
-                <a:cs typeface="Yu Gothic" pitchFamily="34" charset="-120"/>
+                <a:latin typeface="Noto Sans JP" pitchFamily="34" charset="0"/>
+                <a:ea typeface="Noto Sans JP" pitchFamily="34" charset="-122"/>
+                <a:cs typeface="Noto Sans JP" pitchFamily="34" charset="-120"/>
               </a:rPr>
               <a:t>フィールド割り当て</a:t>
             </a:r>
@@ -5030,9 +5030,9 @@
                 <a:solidFill>
                   <a:srgbClr val="E8833A"/>
                 </a:solidFill>
-                <a:latin typeface="Yu Gothic" pitchFamily="34" charset="0"/>
-                <a:ea typeface="Yu Gothic" pitchFamily="34" charset="-122"/>
-                <a:cs typeface="Yu Gothic" pitchFamily="34" charset="-120"/>
+                <a:latin typeface="Noto Sans JP" pitchFamily="34" charset="0"/>
+                <a:ea typeface="Noto Sans JP" pitchFamily="34" charset="-122"/>
+                <a:cs typeface="Noto Sans JP" pitchFamily="34" charset="-120"/>
               </a:rPr>
               <a:t>約10分</a:t>
             </a:r>
@@ -5069,9 +5069,9 @@
                 <a:solidFill>
                   <a:srgbClr val="E8833A"/>
                 </a:solidFill>
-                <a:latin typeface="Yu Gothic" pitchFamily="34" charset="0"/>
-                <a:ea typeface="Yu Gothic" pitchFamily="34" charset="-122"/>
-                <a:cs typeface="Yu Gothic" pitchFamily="34" charset="-120"/>
+                <a:latin typeface="Noto Sans JP" pitchFamily="34" charset="0"/>
+                <a:ea typeface="Noto Sans JP" pitchFamily="34" charset="-122"/>
+                <a:cs typeface="Noto Sans JP" pitchFamily="34" charset="-120"/>
               </a:rPr>
               <a:t>→</a:t>
             </a:r>
@@ -5150,9 +5150,9 @@
                 <a:solidFill>
                   <a:srgbClr val="FFFFFF"/>
                 </a:solidFill>
-                <a:latin typeface="Yu Gothic" pitchFamily="34" charset="0"/>
-                <a:ea typeface="Yu Gothic" pitchFamily="34" charset="-122"/>
-                <a:cs typeface="Yu Gothic" pitchFamily="34" charset="-120"/>
+                <a:latin typeface="Noto Sans JP" pitchFamily="34" charset="0"/>
+                <a:ea typeface="Noto Sans JP" pitchFamily="34" charset="-122"/>
+                <a:cs typeface="Noto Sans JP" pitchFamily="34" charset="-120"/>
               </a:rPr>
               <a:t>3</a:t>
             </a:r>
@@ -5192,9 +5192,9 @@
                 <a:solidFill>
                   <a:srgbClr val="1E2761"/>
                 </a:solidFill>
-                <a:latin typeface="Yu Gothic" pitchFamily="34" charset="0"/>
-                <a:ea typeface="Yu Gothic" pitchFamily="34" charset="-122"/>
-                <a:cs typeface="Yu Gothic" pitchFamily="34" charset="-120"/>
+                <a:latin typeface="Noto Sans JP" pitchFamily="34" charset="0"/>
+                <a:ea typeface="Noto Sans JP" pitchFamily="34" charset="-122"/>
+                <a:cs typeface="Noto Sans JP" pitchFamily="34" charset="-120"/>
               </a:rPr>
               <a:t>APIキー設定・</a:t>
             </a:r>
@@ -5212,9 +5212,9 @@
                 <a:solidFill>
                   <a:srgbClr val="1E2761"/>
                 </a:solidFill>
-                <a:latin typeface="Yu Gothic" pitchFamily="34" charset="0"/>
-                <a:ea typeface="Yu Gothic" pitchFamily="34" charset="-122"/>
-                <a:cs typeface="Yu Gothic" pitchFamily="34" charset="-120"/>
+                <a:latin typeface="Noto Sans JP" pitchFamily="34" charset="0"/>
+                <a:ea typeface="Noto Sans JP" pitchFamily="34" charset="-122"/>
+                <a:cs typeface="Noto Sans JP" pitchFamily="34" charset="-120"/>
               </a:rPr>
               <a:t>接続テスト</a:t>
             </a:r>
@@ -5251,9 +5251,9 @@
                 <a:solidFill>
                   <a:srgbClr val="E8833A"/>
                 </a:solidFill>
-                <a:latin typeface="Yu Gothic" pitchFamily="34" charset="0"/>
-                <a:ea typeface="Yu Gothic" pitchFamily="34" charset="-122"/>
-                <a:cs typeface="Yu Gothic" pitchFamily="34" charset="-120"/>
+                <a:latin typeface="Noto Sans JP" pitchFamily="34" charset="0"/>
+                <a:ea typeface="Noto Sans JP" pitchFamily="34" charset="-122"/>
+                <a:cs typeface="Noto Sans JP" pitchFamily="34" charset="-120"/>
               </a:rPr>
               <a:t>約5分</a:t>
             </a:r>
@@ -5290,9 +5290,9 @@
                 <a:solidFill>
                   <a:srgbClr val="E8833A"/>
                 </a:solidFill>
-                <a:latin typeface="Yu Gothic" pitchFamily="34" charset="0"/>
-                <a:ea typeface="Yu Gothic" pitchFamily="34" charset="-122"/>
-                <a:cs typeface="Yu Gothic" pitchFamily="34" charset="-120"/>
+                <a:latin typeface="Noto Sans JP" pitchFamily="34" charset="0"/>
+                <a:ea typeface="Noto Sans JP" pitchFamily="34" charset="-122"/>
+                <a:cs typeface="Noto Sans JP" pitchFamily="34" charset="-120"/>
               </a:rPr>
               <a:t>→</a:t>
             </a:r>
@@ -5371,9 +5371,9 @@
                 <a:solidFill>
                   <a:srgbClr val="FFFFFF"/>
                 </a:solidFill>
-                <a:latin typeface="Yu Gothic" pitchFamily="34" charset="0"/>
-                <a:ea typeface="Yu Gothic" pitchFamily="34" charset="-122"/>
-                <a:cs typeface="Yu Gothic" pitchFamily="34" charset="-120"/>
+                <a:latin typeface="Noto Sans JP" pitchFamily="34" charset="0"/>
+                <a:ea typeface="Noto Sans JP" pitchFamily="34" charset="-122"/>
+                <a:cs typeface="Noto Sans JP" pitchFamily="34" charset="-120"/>
               </a:rPr>
               <a:t>4</a:t>
             </a:r>
@@ -5413,9 +5413,9 @@
                 <a:solidFill>
                   <a:srgbClr val="1E2761"/>
                 </a:solidFill>
-                <a:latin typeface="Yu Gothic" pitchFamily="34" charset="0"/>
-                <a:ea typeface="Yu Gothic" pitchFamily="34" charset="-122"/>
-                <a:cs typeface="Yu Gothic" pitchFamily="34" charset="-120"/>
+                <a:latin typeface="Noto Sans JP" pitchFamily="34" charset="0"/>
+                <a:ea typeface="Noto Sans JP" pitchFamily="34" charset="-122"/>
+                <a:cs typeface="Noto Sans JP" pitchFamily="34" charset="-120"/>
               </a:rPr>
               <a:t>既存図面の一括登録</a:t>
             </a:r>
@@ -5452,9 +5452,9 @@
                 <a:solidFill>
                   <a:srgbClr val="E8833A"/>
                 </a:solidFill>
-                <a:latin typeface="Yu Gothic" pitchFamily="34" charset="0"/>
-                <a:ea typeface="Yu Gothic" pitchFamily="34" charset="-122"/>
-                <a:cs typeface="Yu Gothic" pitchFamily="34" charset="-120"/>
+                <a:latin typeface="Noto Sans JP" pitchFamily="34" charset="0"/>
+                <a:ea typeface="Noto Sans JP" pitchFamily="34" charset="-122"/>
+                <a:cs typeface="Noto Sans JP" pitchFamily="34" charset="-120"/>
               </a:rPr>
               <a:t>約10分〜（件数による）</a:t>
             </a:r>
@@ -5513,9 +5513,9 @@
                 <a:solidFill>
                   <a:srgbClr val="E8833A"/>
                 </a:solidFill>
-                <a:latin typeface="Yu Gothic" pitchFamily="34" charset="0"/>
-                <a:ea typeface="Yu Gothic" pitchFamily="34" charset="-122"/>
-                <a:cs typeface="Yu Gothic" pitchFamily="34" charset="-120"/>
+                <a:latin typeface="Noto Sans JP" pitchFamily="34" charset="0"/>
+                <a:ea typeface="Noto Sans JP" pitchFamily="34" charset="-122"/>
+                <a:cs typeface="Noto Sans JP" pitchFamily="34" charset="-120"/>
               </a:rPr>
               <a:t>前提条件</a:t>
             </a:r>
@@ -5552,9 +5552,9 @@
                 <a:solidFill>
                   <a:srgbClr val="1A1F36"/>
                 </a:solidFill>
-                <a:latin typeface="Yu Gothic" pitchFamily="34" charset="0"/>
-                <a:ea typeface="Yu Gothic" pitchFamily="34" charset="-122"/>
-                <a:cs typeface="Yu Gothic" pitchFamily="34" charset="-120"/>
+                <a:latin typeface="Noto Sans JP" pitchFamily="34" charset="0"/>
+                <a:ea typeface="Noto Sans JP" pitchFamily="34" charset="-122"/>
+                <a:cs typeface="Noto Sans JP" pitchFamily="34" charset="-120"/>
               </a:rPr>
               <a:t>kintoneスタンダードコース ／ 図面PDFを添付した図面管理アプリ</a:t>
             </a:r>
@@ -5591,9 +5591,9 @@
                 <a:solidFill>
                   <a:srgbClr val="5A6478"/>
                 </a:solidFill>
-                <a:latin typeface="Yu Gothic" pitchFamily="34" charset="0"/>
-                <a:ea typeface="Yu Gothic" pitchFamily="34" charset="-122"/>
-                <a:cs typeface="Yu Gothic" pitchFamily="34" charset="-120"/>
+                <a:latin typeface="Noto Sans JP" pitchFamily="34" charset="0"/>
+                <a:ea typeface="Noto Sans JP" pitchFamily="34" charset="-122"/>
+                <a:cs typeface="Noto Sans JP" pitchFamily="34" charset="-120"/>
               </a:rPr>
               <a:t>12</a:t>
             </a:r>
@@ -5662,9 +5662,9 @@
                 <a:solidFill>
                   <a:srgbClr val="1E2761"/>
                 </a:solidFill>
-                <a:latin typeface="Yu Gothic" pitchFamily="34" charset="0"/>
-                <a:ea typeface="Yu Gothic" pitchFamily="34" charset="-122"/>
-                <a:cs typeface="Yu Gothic" pitchFamily="34" charset="-120"/>
+                <a:latin typeface="Noto Sans JP" pitchFamily="34" charset="0"/>
+                <a:ea typeface="Noto Sans JP" pitchFamily="34" charset="-122"/>
+                <a:cs typeface="Noto Sans JP" pitchFamily="34" charset="-120"/>
               </a:rPr>
               <a:t>モニターの進め方</a:t>
             </a:r>
@@ -5777,9 +5777,9 @@
                 <a:solidFill>
                   <a:srgbClr val="1E2761"/>
                 </a:solidFill>
-                <a:latin typeface="Yu Gothic" pitchFamily="34" charset="0"/>
-                <a:ea typeface="Yu Gothic" pitchFamily="34" charset="-122"/>
-                <a:cs typeface="Yu Gothic" pitchFamily="34" charset="-120"/>
+                <a:latin typeface="Noto Sans JP" pitchFamily="34" charset="0"/>
+                <a:ea typeface="Noto Sans JP" pitchFamily="34" charset="-122"/>
+                <a:cs typeface="Noto Sans JP" pitchFamily="34" charset="-120"/>
               </a:rPr>
               <a:t>Step 1　品質評価</a:t>
             </a:r>
@@ -5819,9 +5819,9 @@
                 <a:solidFill>
                   <a:srgbClr val="1A1F36"/>
                 </a:solidFill>
-                <a:latin typeface="Yu Gothic" pitchFamily="34" charset="0"/>
-                <a:ea typeface="Yu Gothic" pitchFamily="34" charset="-122"/>
-                <a:cs typeface="Yu Gothic" pitchFamily="34" charset="-120"/>
+                <a:latin typeface="Noto Sans JP" pitchFamily="34" charset="0"/>
+                <a:ea typeface="Noto Sans JP" pitchFamily="34" charset="-122"/>
+                <a:cs typeface="Noto Sans JP" pitchFamily="34" charset="-120"/>
               </a:rPr>
               <a:t>まず100〜300枚を登録し、検索結果の体感品質を評価していただきます（〜2週間目安）</a:t>
             </a:r>
@@ -5934,9 +5934,9 @@
                 <a:solidFill>
                   <a:srgbClr val="1E2761"/>
                 </a:solidFill>
-                <a:latin typeface="Yu Gothic" pitchFamily="34" charset="0"/>
-                <a:ea typeface="Yu Gothic" pitchFamily="34" charset="-122"/>
-                <a:cs typeface="Yu Gothic" pitchFamily="34" charset="-120"/>
+                <a:latin typeface="Noto Sans JP" pitchFamily="34" charset="0"/>
+                <a:ea typeface="Noto Sans JP" pitchFamily="34" charset="-122"/>
+                <a:cs typeface="Noto Sans JP" pitchFamily="34" charset="-120"/>
               </a:rPr>
               <a:t>Step 2　フィードバック</a:t>
             </a:r>
@@ -5976,9 +5976,9 @@
                 <a:solidFill>
                   <a:srgbClr val="1A1F36"/>
                 </a:solidFill>
-                <a:latin typeface="Yu Gothic" pitchFamily="34" charset="0"/>
-                <a:ea typeface="Yu Gothic" pitchFamily="34" charset="-122"/>
-                <a:cs typeface="Yu Gothic" pitchFamily="34" charset="-120"/>
+                <a:latin typeface="Noto Sans JP" pitchFamily="34" charset="0"/>
+                <a:ea typeface="Noto Sans JP" pitchFamily="34" charset="-122"/>
+                <a:cs typeface="Noto Sans JP" pitchFamily="34" charset="-120"/>
               </a:rPr>
               <a:t>気づきを共有いただき、私たちが改善点を整理します</a:t>
             </a:r>
@@ -6091,9 +6091,9 @@
                 <a:solidFill>
                   <a:srgbClr val="1E2761"/>
                 </a:solidFill>
-                <a:latin typeface="Yu Gothic" pitchFamily="34" charset="0"/>
-                <a:ea typeface="Yu Gothic" pitchFamily="34" charset="-122"/>
-                <a:cs typeface="Yu Gothic" pitchFamily="34" charset="-120"/>
+                <a:latin typeface="Noto Sans JP" pitchFamily="34" charset="0"/>
+                <a:ea typeface="Noto Sans JP" pitchFamily="34" charset="-122"/>
+                <a:cs typeface="Noto Sans JP" pitchFamily="34" charset="-120"/>
               </a:rPr>
               <a:t>Step 3　チューニング</a:t>
             </a:r>
@@ -6111,9 +6111,9 @@
                 <a:solidFill>
                   <a:srgbClr val="1E2761"/>
                 </a:solidFill>
-                <a:latin typeface="Yu Gothic" pitchFamily="34" charset="0"/>
-                <a:ea typeface="Yu Gothic" pitchFamily="34" charset="-122"/>
-                <a:cs typeface="Yu Gothic" pitchFamily="34" charset="-120"/>
+                <a:latin typeface="Noto Sans JP" pitchFamily="34" charset="0"/>
+                <a:ea typeface="Noto Sans JP" pitchFamily="34" charset="-122"/>
+                <a:cs typeface="Noto Sans JP" pitchFamily="34" charset="-120"/>
               </a:rPr>
               <a:t>→全件展開</a:t>
             </a:r>
@@ -6153,9 +6153,9 @@
                 <a:solidFill>
                   <a:srgbClr val="1A1F36"/>
                 </a:solidFill>
-                <a:latin typeface="Yu Gothic" pitchFamily="34" charset="0"/>
-                <a:ea typeface="Yu Gothic" pitchFamily="34" charset="-122"/>
-                <a:cs typeface="Yu Gothic" pitchFamily="34" charset="-120"/>
+                <a:latin typeface="Noto Sans JP" pitchFamily="34" charset="0"/>
+                <a:ea typeface="Noto Sans JP" pitchFamily="34" charset="-122"/>
+                <a:cs typeface="Noto Sans JP" pitchFamily="34" charset="-120"/>
               </a:rPr>
               <a:t>評価を反映してチューニングを行い、全図面へ展開します</a:t>
             </a:r>
@@ -6214,9 +6214,9 @@
                 <a:solidFill>
                   <a:srgbClr val="E8833A"/>
                 </a:solidFill>
-                <a:latin typeface="Yu Gothic" pitchFamily="34" charset="0"/>
-                <a:ea typeface="Yu Gothic" pitchFamily="34" charset="-122"/>
-                <a:cs typeface="Yu Gothic" pitchFamily="34" charset="-120"/>
+                <a:latin typeface="Noto Sans JP" pitchFamily="34" charset="0"/>
+                <a:ea typeface="Noto Sans JP" pitchFamily="34" charset="-122"/>
+                <a:cs typeface="Noto Sans JP" pitchFamily="34" charset="-120"/>
               </a:rPr>
               <a:t>評価観点</a:t>
             </a:r>
@@ -6257,9 +6257,9 @@
                 <a:solidFill>
                   <a:srgbClr val="1A1F36"/>
                 </a:solidFill>
-                <a:latin typeface="Yu Gothic" pitchFamily="34" charset="0"/>
-                <a:ea typeface="Yu Gothic" pitchFamily="34" charset="-122"/>
-                <a:cs typeface="Yu Gothic" pitchFamily="34" charset="-120"/>
+                <a:latin typeface="Noto Sans JP" pitchFamily="34" charset="0"/>
+                <a:ea typeface="Noto Sans JP" pitchFamily="34" charset="-122"/>
+                <a:cs typeface="Noto Sans JP" pitchFamily="34" charset="-120"/>
               </a:rPr>
               <a:t>上位に欲しい図面が出るか</a:t>
             </a:r>
@@ -6278,9 +6278,9 @@
                 <a:solidFill>
                   <a:srgbClr val="1A1F36"/>
                 </a:solidFill>
-                <a:latin typeface="Yu Gothic" pitchFamily="34" charset="0"/>
-                <a:ea typeface="Yu Gothic" pitchFamily="34" charset="-122"/>
-                <a:cs typeface="Yu Gothic" pitchFamily="34" charset="-120"/>
+                <a:latin typeface="Noto Sans JP" pitchFamily="34" charset="0"/>
+                <a:ea typeface="Noto Sans JP" pitchFamily="34" charset="-122"/>
+                <a:cs typeface="Noto Sans JP" pitchFamily="34" charset="-120"/>
               </a:rPr>
               <a:t>スコアの納得感</a:t>
             </a:r>
@@ -6299,9 +6299,9 @@
                 <a:solidFill>
                   <a:srgbClr val="1A1F36"/>
                 </a:solidFill>
-                <a:latin typeface="Yu Gothic" pitchFamily="34" charset="0"/>
-                <a:ea typeface="Yu Gothic" pitchFamily="34" charset="-122"/>
-                <a:cs typeface="Yu Gothic" pitchFamily="34" charset="-120"/>
+                <a:latin typeface="Noto Sans JP" pitchFamily="34" charset="0"/>
+                <a:ea typeface="Noto Sans JP" pitchFamily="34" charset="-122"/>
+                <a:cs typeface="Noto Sans JP" pitchFamily="34" charset="-120"/>
               </a:rPr>
               <a:t>業務のどの場面で役立ったか</a:t>
             </a:r>
@@ -6338,9 +6338,9 @@
                 <a:solidFill>
                   <a:srgbClr val="5A6478"/>
                 </a:solidFill>
-                <a:latin typeface="Yu Gothic" pitchFamily="34" charset="0"/>
-                <a:ea typeface="Yu Gothic" pitchFamily="34" charset="-122"/>
-                <a:cs typeface="Yu Gothic" pitchFamily="34" charset="-120"/>
+                <a:latin typeface="Noto Sans JP" pitchFamily="34" charset="0"/>
+                <a:ea typeface="Noto Sans JP" pitchFamily="34" charset="-122"/>
+                <a:cs typeface="Noto Sans JP" pitchFamily="34" charset="-120"/>
               </a:rPr>
               <a:t>13</a:t>
             </a:r>
@@ -6409,9 +6409,9 @@
                 <a:solidFill>
                   <a:srgbClr val="1E2761"/>
                 </a:solidFill>
-                <a:latin typeface="Yu Gothic" pitchFamily="34" charset="0"/>
-                <a:ea typeface="Yu Gothic" pitchFamily="34" charset="-122"/>
-                <a:cs typeface="Yu Gothic" pitchFamily="34" charset="-120"/>
+                <a:latin typeface="Noto Sans JP" pitchFamily="34" charset="0"/>
+                <a:ea typeface="Noto Sans JP" pitchFamily="34" charset="-122"/>
+                <a:cs typeface="Noto Sans JP" pitchFamily="34" charset="-120"/>
               </a:rPr>
               <a:t>現時点の制約と今後の予定</a:t>
             </a:r>
@@ -6514,9 +6514,9 @@
                 <a:solidFill>
                   <a:srgbClr val="1E2761"/>
                 </a:solidFill>
-                <a:latin typeface="Yu Gothic" pitchFamily="34" charset="0"/>
-                <a:ea typeface="Yu Gothic" pitchFamily="34" charset="-122"/>
-                <a:cs typeface="Yu Gothic" pitchFamily="34" charset="-120"/>
+                <a:latin typeface="Noto Sans JP" pitchFamily="34" charset="0"/>
+                <a:ea typeface="Noto Sans JP" pitchFamily="34" charset="-122"/>
+                <a:cs typeface="Noto Sans JP" pitchFamily="34" charset="-120"/>
               </a:rPr>
               <a:t>ご了承いただきたいこと</a:t>
             </a:r>
@@ -6560,9 +6560,9 @@
                 <a:solidFill>
                   <a:srgbClr val="1A1F36"/>
                 </a:solidFill>
-                <a:latin typeface="Yu Gothic" pitchFamily="34" charset="0"/>
-                <a:ea typeface="Yu Gothic" pitchFamily="34" charset="-122"/>
-                <a:cs typeface="Yu Gothic" pitchFamily="34" charset="-120"/>
+                <a:latin typeface="Noto Sans JP" pitchFamily="34" charset="0"/>
+                <a:ea typeface="Noto Sans JP" pitchFamily="34" charset="-122"/>
+                <a:cs typeface="Noto Sans JP" pitchFamily="34" charset="-120"/>
               </a:rPr>
               <a:t>検索精度は図面の種類・作図スタイルに依存します（モニターで一緒に改善していく前提です）</a:t>
             </a:r>
@@ -6584,9 +6584,9 @@
                 <a:solidFill>
                   <a:srgbClr val="1A1F36"/>
                 </a:solidFill>
-                <a:latin typeface="Yu Gothic" pitchFamily="34" charset="0"/>
-                <a:ea typeface="Yu Gothic" pitchFamily="34" charset="-122"/>
-                <a:cs typeface="Yu Gothic" pitchFamily="34" charset="-120"/>
+                <a:latin typeface="Noto Sans JP" pitchFamily="34" charset="0"/>
+                <a:ea typeface="Noto Sans JP" pitchFamily="34" charset="-122"/>
+                <a:cs typeface="Noto Sans JP" pitchFamily="34" charset="-120"/>
               </a:rPr>
               <a:t>スコアは相対的な目安です</a:t>
             </a:r>
@@ -6608,9 +6608,9 @@
                 <a:solidFill>
                   <a:srgbClr val="1A1F36"/>
                 </a:solidFill>
-                <a:latin typeface="Yu Gothic" pitchFamily="34" charset="0"/>
-                <a:ea typeface="Yu Gothic" pitchFamily="34" charset="-122"/>
-                <a:cs typeface="Yu Gothic" pitchFamily="34" charset="-120"/>
+                <a:latin typeface="Noto Sans JP" pitchFamily="34" charset="0"/>
+                <a:ea typeface="Noto Sans JP" pitchFamily="34" charset="-122"/>
+                <a:cs typeface="Noto Sans JP" pitchFamily="34" charset="-120"/>
               </a:rPr>
               <a:t>検索対象はPDFの1ページ目です</a:t>
             </a:r>
@@ -6632,9 +6632,9 @@
                 <a:solidFill>
                   <a:srgbClr val="1A1F36"/>
                 </a:solidFill>
-                <a:latin typeface="Yu Gothic" pitchFamily="34" charset="0"/>
-                <a:ea typeface="Yu Gothic" pitchFamily="34" charset="-122"/>
-                <a:cs typeface="Yu Gothic" pitchFamily="34" charset="-120"/>
+                <a:latin typeface="Noto Sans JP" pitchFamily="34" charset="0"/>
+                <a:ea typeface="Noto Sans JP" pitchFamily="34" charset="-122"/>
+                <a:cs typeface="Noto Sans JP" pitchFamily="34" charset="-120"/>
               </a:rPr>
               <a:t>しばらく未使用の後の初回検索は、起動に数十秒かかる場合があります</a:t>
             </a:r>
@@ -6737,9 +6737,9 @@
                 <a:solidFill>
                   <a:srgbClr val="1E2761"/>
                 </a:solidFill>
-                <a:latin typeface="Yu Gothic" pitchFamily="34" charset="0"/>
-                <a:ea typeface="Yu Gothic" pitchFamily="34" charset="-122"/>
-                <a:cs typeface="Yu Gothic" pitchFamily="34" charset="-120"/>
+                <a:latin typeface="Noto Sans JP" pitchFamily="34" charset="0"/>
+                <a:ea typeface="Noto Sans JP" pitchFamily="34" charset="-122"/>
+                <a:cs typeface="Noto Sans JP" pitchFamily="34" charset="-120"/>
               </a:rPr>
               <a:t>今後の予定</a:t>
             </a:r>
@@ -6783,9 +6783,9 @@
                 <a:solidFill>
                   <a:srgbClr val="1A1F36"/>
                 </a:solidFill>
-                <a:latin typeface="Yu Gothic" pitchFamily="34" charset="0"/>
-                <a:ea typeface="Yu Gothic" pitchFamily="34" charset="-122"/>
-                <a:cs typeface="Yu Gothic" pitchFamily="34" charset="-120"/>
+                <a:latin typeface="Noto Sans JP" pitchFamily="34" charset="0"/>
+                <a:ea typeface="Noto Sans JP" pitchFamily="34" charset="-122"/>
+                <a:cs typeface="Noto Sans JP" pitchFamily="34" charset="-120"/>
               </a:rPr>
               <a:t>過去図面アーカイブ検索の本格提供</a:t>
             </a:r>
@@ -6807,9 +6807,9 @@
                 <a:solidFill>
                   <a:srgbClr val="1A1F36"/>
                 </a:solidFill>
-                <a:latin typeface="Yu Gothic" pitchFamily="34" charset="0"/>
-                <a:ea typeface="Yu Gothic" pitchFamily="34" charset="-122"/>
-                <a:cs typeface="Yu Gothic" pitchFamily="34" charset="-120"/>
+                <a:latin typeface="Noto Sans JP" pitchFamily="34" charset="0"/>
+                <a:ea typeface="Noto Sans JP" pitchFamily="34" charset="-122"/>
+                <a:cs typeface="Noto Sans JP" pitchFamily="34" charset="-120"/>
               </a:rPr>
               <a:t>精度チューニングの継続</a:t>
             </a:r>
@@ -6831,9 +6831,9 @@
                 <a:solidFill>
                   <a:srgbClr val="1A1F36"/>
                 </a:solidFill>
-                <a:latin typeface="Yu Gothic" pitchFamily="34" charset="0"/>
-                <a:ea typeface="Yu Gothic" pitchFamily="34" charset="-122"/>
-                <a:cs typeface="Yu Gothic" pitchFamily="34" charset="-120"/>
+                <a:latin typeface="Noto Sans JP" pitchFamily="34" charset="0"/>
+                <a:ea typeface="Noto Sans JP" pitchFamily="34" charset="-122"/>
+                <a:cs typeface="Noto Sans JP" pitchFamily="34" charset="-120"/>
               </a:rPr>
               <a:t>管理機能の拡充</a:t>
             </a:r>
@@ -6870,9 +6870,9 @@
                 <a:solidFill>
                   <a:srgbClr val="5A6478"/>
                 </a:solidFill>
-                <a:latin typeface="Yu Gothic" pitchFamily="34" charset="0"/>
-                <a:ea typeface="Yu Gothic" pitchFamily="34" charset="-122"/>
-                <a:cs typeface="Yu Gothic" pitchFamily="34" charset="-120"/>
+                <a:latin typeface="Noto Sans JP" pitchFamily="34" charset="0"/>
+                <a:ea typeface="Noto Sans JP" pitchFamily="34" charset="-122"/>
+                <a:cs typeface="Noto Sans JP" pitchFamily="34" charset="-120"/>
               </a:rPr>
               <a:t>14</a:t>
             </a:r>
@@ -6941,9 +6941,9 @@
                 <a:solidFill>
                   <a:srgbClr val="1E2761"/>
                 </a:solidFill>
-                <a:latin typeface="Yu Gothic" pitchFamily="34" charset="0"/>
-                <a:ea typeface="Yu Gothic" pitchFamily="34" charset="-122"/>
-                <a:cs typeface="Yu Gothic" pitchFamily="34" charset="-120"/>
+                <a:latin typeface="Noto Sans JP" pitchFamily="34" charset="0"/>
+                <a:ea typeface="Noto Sans JP" pitchFamily="34" charset="-122"/>
+                <a:cs typeface="Noto Sans JP" pitchFamily="34" charset="-120"/>
               </a:rPr>
               <a:t>お願いしたいこと</a:t>
             </a:r>
@@ -7046,9 +7046,9 @@
                 <a:solidFill>
                   <a:srgbClr val="1A1F36"/>
                 </a:solidFill>
-                <a:latin typeface="Yu Gothic" pitchFamily="34" charset="0"/>
-                <a:ea typeface="Yu Gothic" pitchFamily="34" charset="-122"/>
-                <a:cs typeface="Yu Gothic" pitchFamily="34" charset="-120"/>
+                <a:latin typeface="Noto Sans JP" pitchFamily="34" charset="0"/>
+                <a:ea typeface="Noto Sans JP" pitchFamily="34" charset="-122"/>
+                <a:cs typeface="Noto Sans JP" pitchFamily="34" charset="-120"/>
               </a:rPr>
               <a:t>実際の図面データでの品質評価</a:t>
             </a:r>
@@ -7151,9 +7151,9 @@
                 <a:solidFill>
                   <a:srgbClr val="1A1F36"/>
                 </a:solidFill>
-                <a:latin typeface="Yu Gothic" pitchFamily="34" charset="0"/>
-                <a:ea typeface="Yu Gothic" pitchFamily="34" charset="-122"/>
-                <a:cs typeface="Yu Gothic" pitchFamily="34" charset="-120"/>
+                <a:latin typeface="Noto Sans JP" pitchFamily="34" charset="0"/>
+                <a:ea typeface="Noto Sans JP" pitchFamily="34" charset="-122"/>
+                <a:cs typeface="Noto Sans JP" pitchFamily="34" charset="-120"/>
               </a:rPr>
               <a:t>定期的な気づきの共有（週次目安）</a:t>
             </a:r>
@@ -7256,9 +7256,9 @@
                 <a:solidFill>
                   <a:srgbClr val="1A1F36"/>
                 </a:solidFill>
-                <a:latin typeface="Yu Gothic" pitchFamily="34" charset="0"/>
-                <a:ea typeface="Yu Gothic" pitchFamily="34" charset="-122"/>
-                <a:cs typeface="Yu Gothic" pitchFamily="34" charset="-120"/>
+                <a:latin typeface="Noto Sans JP" pitchFamily="34" charset="0"/>
+                <a:ea typeface="Noto Sans JP" pitchFamily="34" charset="-122"/>
+                <a:cs typeface="Noto Sans JP" pitchFamily="34" charset="-120"/>
               </a:rPr>
               <a:t>業務フローの中で使える場面の発見</a:t>
             </a:r>
@@ -7361,9 +7361,9 @@
                 <a:solidFill>
                   <a:srgbClr val="FFFFFF"/>
                 </a:solidFill>
-                <a:latin typeface="Yu Gothic" pitchFamily="34" charset="0"/>
-                <a:ea typeface="Yu Gothic" pitchFamily="34" charset="-122"/>
-                <a:cs typeface="Yu Gothic" pitchFamily="34" charset="-120"/>
+                <a:latin typeface="Noto Sans JP" pitchFamily="34" charset="0"/>
+                <a:ea typeface="Noto Sans JP" pitchFamily="34" charset="-122"/>
+                <a:cs typeface="Noto Sans JP" pitchFamily="34" charset="-120"/>
               </a:rPr>
               <a:t>PlugBits サポート窓口</a:t>
             </a:r>
@@ -7400,9 +7400,9 @@
                 <a:solidFill>
                   <a:srgbClr val="CADCFC"/>
                 </a:solidFill>
-                <a:latin typeface="Yu Gothic" pitchFamily="34" charset="0"/>
-                <a:ea typeface="Yu Gothic" pitchFamily="34" charset="-122"/>
-                <a:cs typeface="Yu Gothic" pitchFamily="34" charset="-120"/>
+                <a:latin typeface="Noto Sans JP" pitchFamily="34" charset="0"/>
+                <a:ea typeface="Noto Sans JP" pitchFamily="34" charset="-122"/>
+                <a:cs typeface="Noto Sans JP" pitchFamily="34" charset="-120"/>
               </a:rPr>
               <a:t>連絡先は別途ご案内いたします</a:t>
             </a:r>
@@ -7439,9 +7439,9 @@
                 <a:solidFill>
                   <a:srgbClr val="5A6478"/>
                 </a:solidFill>
-                <a:latin typeface="Yu Gothic" pitchFamily="34" charset="0"/>
-                <a:ea typeface="Yu Gothic" pitchFamily="34" charset="-122"/>
-                <a:cs typeface="Yu Gothic" pitchFamily="34" charset="-120"/>
+                <a:latin typeface="Noto Sans JP" pitchFamily="34" charset="0"/>
+                <a:ea typeface="Noto Sans JP" pitchFamily="34" charset="-122"/>
+                <a:cs typeface="Noto Sans JP" pitchFamily="34" charset="-120"/>
               </a:rPr>
               <a:t>15</a:t>
             </a:r>
@@ -8105,9 +8105,9 @@
                 <a:solidFill>
                   <a:srgbClr val="FFFFFF"/>
                 </a:solidFill>
-                <a:latin typeface="Yu Gothic" pitchFamily="34" charset="0"/>
-                <a:ea typeface="Yu Gothic" pitchFamily="34" charset="-122"/>
-                <a:cs typeface="Yu Gothic" pitchFamily="34" charset="-120"/>
+                <a:latin typeface="Noto Sans JP" pitchFamily="34" charset="0"/>
+                <a:ea typeface="Noto Sans JP" pitchFamily="34" charset="-122"/>
+                <a:cs typeface="Noto Sans JP" pitchFamily="34" charset="-120"/>
               </a:rPr>
               <a:t>まずは100枚、登録から始めましょう。</a:t>
             </a:r>
@@ -8144,9 +8144,9 @@
                 <a:solidFill>
                   <a:srgbClr val="CADCFC"/>
                 </a:solidFill>
-                <a:latin typeface="Yu Gothic" pitchFamily="34" charset="0"/>
-                <a:ea typeface="Yu Gothic" pitchFamily="34" charset="-122"/>
-                <a:cs typeface="Yu Gothic" pitchFamily="34" charset="-120"/>
+                <a:latin typeface="Noto Sans JP" pitchFamily="34" charset="0"/>
+                <a:ea typeface="Noto Sans JP" pitchFamily="34" charset="-122"/>
+                <a:cs typeface="Noto Sans JP" pitchFamily="34" charset="-120"/>
               </a:rPr>
               <a:t>本日はありがとうございました</a:t>
             </a:r>
@@ -8183,9 +8183,9 @@
                 <a:solidFill>
                   <a:srgbClr val="CADCFC"/>
                 </a:solidFill>
-                <a:latin typeface="Yu Gothic" pitchFamily="34" charset="0"/>
-                <a:ea typeface="Yu Gothic" pitchFamily="34" charset="-122"/>
-                <a:cs typeface="Yu Gothic" pitchFamily="34" charset="-120"/>
+                <a:latin typeface="Noto Sans JP" pitchFamily="34" charset="0"/>
+                <a:ea typeface="Noto Sans JP" pitchFamily="34" charset="-122"/>
+                <a:cs typeface="Noto Sans JP" pitchFamily="34" charset="-120"/>
               </a:rPr>
               <a:t>PlugBits</a:t>
             </a:r>
@@ -8254,9 +8254,9 @@
                 <a:solidFill>
                   <a:srgbClr val="1E2761"/>
                 </a:solidFill>
-                <a:latin typeface="Yu Gothic" pitchFamily="34" charset="0"/>
-                <a:ea typeface="Yu Gothic" pitchFamily="34" charset="-122"/>
-                <a:cs typeface="Yu Gothic" pitchFamily="34" charset="-120"/>
+                <a:latin typeface="Noto Sans JP" pitchFamily="34" charset="0"/>
+                <a:ea typeface="Noto Sans JP" pitchFamily="34" charset="-122"/>
+                <a:cs typeface="Noto Sans JP" pitchFamily="34" charset="-120"/>
               </a:rPr>
               <a:t>本日の流れ</a:t>
             </a:r>
@@ -8313,9 +8313,9 @@
                 <a:solidFill>
                   <a:srgbClr val="FFFFFF"/>
                 </a:solidFill>
-                <a:latin typeface="Yu Gothic" pitchFamily="34" charset="0"/>
-                <a:ea typeface="Yu Gothic" pitchFamily="34" charset="-122"/>
-                <a:cs typeface="Yu Gothic" pitchFamily="34" charset="-120"/>
+                <a:latin typeface="Noto Sans JP" pitchFamily="34" charset="0"/>
+                <a:ea typeface="Noto Sans JP" pitchFamily="34" charset="-122"/>
+                <a:cs typeface="Noto Sans JP" pitchFamily="34" charset="-120"/>
               </a:rPr>
               <a:t>1</a:t>
             </a:r>
@@ -8352,9 +8352,9 @@
                 <a:solidFill>
                   <a:srgbClr val="1A1F36"/>
                 </a:solidFill>
-                <a:latin typeface="Yu Gothic" pitchFamily="34" charset="0"/>
-                <a:ea typeface="Yu Gothic" pitchFamily="34" charset="-122"/>
-                <a:cs typeface="Yu Gothic" pitchFamily="34" charset="-120"/>
+                <a:latin typeface="Noto Sans JP" pitchFamily="34" charset="0"/>
+                <a:ea typeface="Noto Sans JP" pitchFamily="34" charset="-122"/>
+                <a:cs typeface="Noto Sans JP" pitchFamily="34" charset="-120"/>
               </a:rPr>
               <a:t>課題と解決アプローチ</a:t>
             </a:r>
@@ -8434,9 +8434,9 @@
                 <a:solidFill>
                   <a:srgbClr val="FFFFFF"/>
                 </a:solidFill>
-                <a:latin typeface="Yu Gothic" pitchFamily="34" charset="0"/>
-                <a:ea typeface="Yu Gothic" pitchFamily="34" charset="-122"/>
-                <a:cs typeface="Yu Gothic" pitchFamily="34" charset="-120"/>
+                <a:latin typeface="Noto Sans JP" pitchFamily="34" charset="0"/>
+                <a:ea typeface="Noto Sans JP" pitchFamily="34" charset="-122"/>
+                <a:cs typeface="Noto Sans JP" pitchFamily="34" charset="-120"/>
               </a:rPr>
               <a:t>2</a:t>
             </a:r>
@@ -8473,9 +8473,9 @@
                 <a:solidFill>
                   <a:srgbClr val="1A1F36"/>
                 </a:solidFill>
-                <a:latin typeface="Yu Gothic" pitchFamily="34" charset="0"/>
-                <a:ea typeface="Yu Gothic" pitchFamily="34" charset="-122"/>
-                <a:cs typeface="Yu Gothic" pitchFamily="34" charset="-120"/>
+                <a:latin typeface="Noto Sans JP" pitchFamily="34" charset="0"/>
+                <a:ea typeface="Noto Sans JP" pitchFamily="34" charset="-122"/>
+                <a:cs typeface="Noto Sans JP" pitchFamily="34" charset="-120"/>
               </a:rPr>
               <a:t>機能のご紹介・デモ</a:t>
             </a:r>
@@ -8555,9 +8555,9 @@
                 <a:solidFill>
                   <a:srgbClr val="FFFFFF"/>
                 </a:solidFill>
-                <a:latin typeface="Yu Gothic" pitchFamily="34" charset="0"/>
-                <a:ea typeface="Yu Gothic" pitchFamily="34" charset="-122"/>
-                <a:cs typeface="Yu Gothic" pitchFamily="34" charset="-120"/>
+                <a:latin typeface="Noto Sans JP" pitchFamily="34" charset="0"/>
+                <a:ea typeface="Noto Sans JP" pitchFamily="34" charset="-122"/>
+                <a:cs typeface="Noto Sans JP" pitchFamily="34" charset="-120"/>
               </a:rPr>
               <a:t>3</a:t>
             </a:r>
@@ -8594,9 +8594,9 @@
                 <a:solidFill>
                   <a:srgbClr val="1A1F36"/>
                 </a:solidFill>
-                <a:latin typeface="Yu Gothic" pitchFamily="34" charset="0"/>
-                <a:ea typeface="Yu Gothic" pitchFamily="34" charset="-122"/>
-                <a:cs typeface="Yu Gothic" pitchFamily="34" charset="-120"/>
+                <a:latin typeface="Noto Sans JP" pitchFamily="34" charset="0"/>
+                <a:ea typeface="Noto Sans JP" pitchFamily="34" charset="-122"/>
+                <a:cs typeface="Noto Sans JP" pitchFamily="34" charset="-120"/>
               </a:rPr>
               <a:t>データの取り扱い</a:t>
             </a:r>
@@ -8676,9 +8676,9 @@
                 <a:solidFill>
                   <a:srgbClr val="FFFFFF"/>
                 </a:solidFill>
-                <a:latin typeface="Yu Gothic" pitchFamily="34" charset="0"/>
-                <a:ea typeface="Yu Gothic" pitchFamily="34" charset="-122"/>
-                <a:cs typeface="Yu Gothic" pitchFamily="34" charset="-120"/>
+                <a:latin typeface="Noto Sans JP" pitchFamily="34" charset="0"/>
+                <a:ea typeface="Noto Sans JP" pitchFamily="34" charset="-122"/>
+                <a:cs typeface="Noto Sans JP" pitchFamily="34" charset="-120"/>
               </a:rPr>
               <a:t>4</a:t>
             </a:r>
@@ -8715,9 +8715,9 @@
                 <a:solidFill>
                   <a:srgbClr val="1A1F36"/>
                 </a:solidFill>
-                <a:latin typeface="Yu Gothic" pitchFamily="34" charset="0"/>
-                <a:ea typeface="Yu Gothic" pitchFamily="34" charset="-122"/>
-                <a:cs typeface="Yu Gothic" pitchFamily="34" charset="-120"/>
+                <a:latin typeface="Noto Sans JP" pitchFamily="34" charset="0"/>
+                <a:ea typeface="Noto Sans JP" pitchFamily="34" charset="-122"/>
+                <a:cs typeface="Noto Sans JP" pitchFamily="34" charset="-120"/>
               </a:rPr>
               <a:t>モニター導入の流れ</a:t>
             </a:r>
@@ -8797,9 +8797,9 @@
                 <a:solidFill>
                   <a:srgbClr val="FFFFFF"/>
                 </a:solidFill>
-                <a:latin typeface="Yu Gothic" pitchFamily="34" charset="0"/>
-                <a:ea typeface="Yu Gothic" pitchFamily="34" charset="-122"/>
-                <a:cs typeface="Yu Gothic" pitchFamily="34" charset="-120"/>
+                <a:latin typeface="Noto Sans JP" pitchFamily="34" charset="0"/>
+                <a:ea typeface="Noto Sans JP" pitchFamily="34" charset="-122"/>
+                <a:cs typeface="Noto Sans JP" pitchFamily="34" charset="-120"/>
               </a:rPr>
               <a:t>5</a:t>
             </a:r>
@@ -8836,9 +8836,9 @@
                 <a:solidFill>
                   <a:srgbClr val="1A1F36"/>
                 </a:solidFill>
-                <a:latin typeface="Yu Gothic" pitchFamily="34" charset="0"/>
-                <a:ea typeface="Yu Gothic" pitchFamily="34" charset="-122"/>
-                <a:cs typeface="Yu Gothic" pitchFamily="34" charset="-120"/>
+                <a:latin typeface="Noto Sans JP" pitchFamily="34" charset="0"/>
+                <a:ea typeface="Noto Sans JP" pitchFamily="34" charset="-122"/>
+                <a:cs typeface="Noto Sans JP" pitchFamily="34" charset="-120"/>
               </a:rPr>
               <a:t>進め方のご相談</a:t>
             </a:r>
@@ -8875,9 +8875,9 @@
                 <a:solidFill>
                   <a:srgbClr val="5A6478"/>
                 </a:solidFill>
-                <a:latin typeface="Yu Gothic" pitchFamily="34" charset="0"/>
-                <a:ea typeface="Yu Gothic" pitchFamily="34" charset="-122"/>
-                <a:cs typeface="Yu Gothic" pitchFamily="34" charset="-120"/>
+                <a:latin typeface="Noto Sans JP" pitchFamily="34" charset="0"/>
+                <a:ea typeface="Noto Sans JP" pitchFamily="34" charset="-122"/>
+                <a:cs typeface="Noto Sans JP" pitchFamily="34" charset="-120"/>
               </a:rPr>
               <a:t>2</a:t>
             </a:r>
@@ -8946,9 +8946,9 @@
                 <a:solidFill>
                   <a:srgbClr val="1E2761"/>
                 </a:solidFill>
-                <a:latin typeface="Yu Gothic" pitchFamily="34" charset="0"/>
-                <a:ea typeface="Yu Gothic" pitchFamily="34" charset="-122"/>
-                <a:cs typeface="Yu Gothic" pitchFamily="34" charset="-120"/>
+                <a:latin typeface="Noto Sans JP" pitchFamily="34" charset="0"/>
+                <a:ea typeface="Noto Sans JP" pitchFamily="34" charset="-122"/>
+                <a:cs typeface="Noto Sans JP" pitchFamily="34" charset="-120"/>
               </a:rPr>
               <a:t>「この図面、前にも作ったはず」が見つからない</a:t>
             </a:r>
@@ -9058,9 +9058,9 @@
                 <a:solidFill>
                   <a:srgbClr val="1E2761"/>
                 </a:solidFill>
-                <a:latin typeface="Yu Gothic" pitchFamily="34" charset="0"/>
-                <a:ea typeface="Yu Gothic" pitchFamily="34" charset="-122"/>
-                <a:cs typeface="Yu Gothic" pitchFamily="34" charset="-120"/>
+                <a:latin typeface="Noto Sans JP" pitchFamily="34" charset="0"/>
+                <a:ea typeface="Noto Sans JP" pitchFamily="34" charset="-122"/>
+                <a:cs typeface="Noto Sans JP" pitchFamily="34" charset="-120"/>
               </a:rPr>
               <a:t>探す時間のロス</a:t>
             </a:r>
@@ -9100,9 +9100,9 @@
                 <a:solidFill>
                   <a:srgbClr val="1A1F36"/>
                 </a:solidFill>
-                <a:latin typeface="Yu Gothic" pitchFamily="34" charset="0"/>
-                <a:ea typeface="Yu Gothic" pitchFamily="34" charset="-122"/>
-                <a:cs typeface="Yu Gothic" pitchFamily="34" charset="-120"/>
+                <a:latin typeface="Noto Sans JP" pitchFamily="34" charset="0"/>
+                <a:ea typeface="Noto Sans JP" pitchFamily="34" charset="-122"/>
+                <a:cs typeface="Noto Sans JP" pitchFamily="34" charset="-120"/>
               </a:rPr>
               <a:t>過去図面をフォルダやファイル名の記憶を頼りに探し、都度時間が失われる</a:t>
             </a:r>
@@ -9212,9 +9212,9 @@
                 <a:solidFill>
                   <a:srgbClr val="1E2761"/>
                 </a:solidFill>
-                <a:latin typeface="Yu Gothic" pitchFamily="34" charset="0"/>
-                <a:ea typeface="Yu Gothic" pitchFamily="34" charset="-122"/>
-                <a:cs typeface="Yu Gothic" pitchFamily="34" charset="-120"/>
+                <a:latin typeface="Noto Sans JP" pitchFamily="34" charset="0"/>
+                <a:ea typeface="Noto Sans JP" pitchFamily="34" charset="-122"/>
+                <a:cs typeface="Noto Sans JP" pitchFamily="34" charset="-120"/>
               </a:rPr>
               <a:t>ベテランの記憶頼み</a:t>
             </a:r>
@@ -9254,9 +9254,9 @@
                 <a:solidFill>
                   <a:srgbClr val="1A1F36"/>
                 </a:solidFill>
-                <a:latin typeface="Yu Gothic" pitchFamily="34" charset="0"/>
-                <a:ea typeface="Yu Gothic" pitchFamily="34" charset="-122"/>
-                <a:cs typeface="Yu Gothic" pitchFamily="34" charset="-120"/>
+                <a:latin typeface="Noto Sans JP" pitchFamily="34" charset="0"/>
+                <a:ea typeface="Noto Sans JP" pitchFamily="34" charset="-122"/>
+                <a:cs typeface="Noto Sans JP" pitchFamily="34" charset="-120"/>
               </a:rPr>
               <a:t>類似実績の有無が特定の人の記憶に依存し、属人化する</a:t>
             </a:r>
@@ -9366,9 +9366,9 @@
                 <a:solidFill>
                   <a:srgbClr val="1E2761"/>
                 </a:solidFill>
-                <a:latin typeface="Yu Gothic" pitchFamily="34" charset="0"/>
-                <a:ea typeface="Yu Gothic" pitchFamily="34" charset="-122"/>
-                <a:cs typeface="Yu Gothic" pitchFamily="34" charset="-120"/>
+                <a:latin typeface="Noto Sans JP" pitchFamily="34" charset="0"/>
+                <a:ea typeface="Noto Sans JP" pitchFamily="34" charset="-122"/>
+                <a:cs typeface="Noto Sans JP" pitchFamily="34" charset="-120"/>
               </a:rPr>
               <a:t>見積根拠が散逸</a:t>
             </a:r>
@@ -9408,9 +9408,9 @@
                 <a:solidFill>
                   <a:srgbClr val="1A1F36"/>
                 </a:solidFill>
-                <a:latin typeface="Yu Gothic" pitchFamily="34" charset="0"/>
-                <a:ea typeface="Yu Gothic" pitchFamily="34" charset="-122"/>
-                <a:cs typeface="Yu Gothic" pitchFamily="34" charset="-120"/>
+                <a:latin typeface="Noto Sans JP" pitchFamily="34" charset="0"/>
+                <a:ea typeface="Noto Sans JP" pitchFamily="34" charset="-122"/>
+                <a:cs typeface="Noto Sans JP" pitchFamily="34" charset="-120"/>
               </a:rPr>
               <a:t>類似品の実績原価・加工方法にたどり着けず、見積のたびにゼロから検討</a:t>
             </a:r>
@@ -9447,9 +9447,9 @@
                 <a:solidFill>
                   <a:srgbClr val="5A6478"/>
                 </a:solidFill>
-                <a:latin typeface="Yu Gothic" pitchFamily="34" charset="0"/>
-                <a:ea typeface="Yu Gothic" pitchFamily="34" charset="-122"/>
-                <a:cs typeface="Yu Gothic" pitchFamily="34" charset="-120"/>
+                <a:latin typeface="Noto Sans JP" pitchFamily="34" charset="0"/>
+                <a:ea typeface="Noto Sans JP" pitchFamily="34" charset="-122"/>
+                <a:cs typeface="Noto Sans JP" pitchFamily="34" charset="-120"/>
               </a:rPr>
               <a:t>3</a:t>
             </a:r>
@@ -9518,9 +9518,9 @@
                 <a:solidFill>
                   <a:srgbClr val="1E2761"/>
                 </a:solidFill>
-                <a:latin typeface="Yu Gothic" pitchFamily="34" charset="0"/>
-                <a:ea typeface="Yu Gothic" pitchFamily="34" charset="-122"/>
-                <a:cs typeface="Yu Gothic" pitchFamily="34" charset="-120"/>
+                <a:latin typeface="Noto Sans JP" pitchFamily="34" charset="0"/>
+                <a:ea typeface="Noto Sans JP" pitchFamily="34" charset="-122"/>
+                <a:cs typeface="Noto Sans JP" pitchFamily="34" charset="-120"/>
               </a:rPr>
               <a:t>kintoneの図面台帳が、AI類似検索エンジンになる</a:t>
             </a:r>
@@ -9630,9 +9630,9 @@
                 <a:solidFill>
                   <a:srgbClr val="1E2761"/>
                 </a:solidFill>
-                <a:latin typeface="Yu Gothic" pitchFamily="34" charset="0"/>
-                <a:ea typeface="Yu Gothic" pitchFamily="34" charset="-122"/>
-                <a:cs typeface="Yu Gothic" pitchFamily="34" charset="-120"/>
+                <a:latin typeface="Noto Sans JP" pitchFamily="34" charset="0"/>
+                <a:ea typeface="Noto Sans JP" pitchFamily="34" charset="-122"/>
+                <a:cs typeface="Noto Sans JP" pitchFamily="34" charset="-120"/>
               </a:rPr>
               <a:t>類似図面検索</a:t>
             </a:r>
@@ -9672,9 +9672,9 @@
                 <a:solidFill>
                   <a:srgbClr val="1A1F36"/>
                 </a:solidFill>
-                <a:latin typeface="Yu Gothic" pitchFamily="34" charset="0"/>
-                <a:ea typeface="Yu Gothic" pitchFamily="34" charset="-122"/>
-                <a:cs typeface="Yu Gothic" pitchFamily="34" charset="-120"/>
+                <a:latin typeface="Noto Sans JP" pitchFamily="34" charset="0"/>
+                <a:ea typeface="Noto Sans JP" pitchFamily="34" charset="-122"/>
+                <a:cs typeface="Noto Sans JP" pitchFamily="34" charset="-120"/>
               </a:rPr>
               <a:t>開いているレコードの図面に似た過去図面を瞬時に一覧表示</a:t>
             </a:r>
@@ -9784,9 +9784,9 @@
                 <a:solidFill>
                   <a:srgbClr val="1E2761"/>
                 </a:solidFill>
-                <a:latin typeface="Yu Gothic" pitchFamily="34" charset="0"/>
-                <a:ea typeface="Yu Gothic" pitchFamily="34" charset="-122"/>
-                <a:cs typeface="Yu Gothic" pitchFamily="34" charset="-120"/>
+                <a:latin typeface="Noto Sans JP" pitchFamily="34" charset="0"/>
+                <a:ea typeface="Noto Sans JP" pitchFamily="34" charset="-122"/>
+                <a:cs typeface="Noto Sans JP" pitchFamily="34" charset="-120"/>
               </a:rPr>
               <a:t>アップロード即検索</a:t>
             </a:r>
@@ -9826,9 +9826,9 @@
                 <a:solidFill>
                   <a:srgbClr val="1A1F36"/>
                 </a:solidFill>
-                <a:latin typeface="Yu Gothic" pitchFamily="34" charset="0"/>
-                <a:ea typeface="Yu Gothic" pitchFamily="34" charset="-122"/>
-                <a:cs typeface="Yu Gothic" pitchFamily="34" charset="-120"/>
+                <a:latin typeface="Noto Sans JP" pitchFamily="34" charset="0"/>
+                <a:ea typeface="Noto Sans JP" pitchFamily="34" charset="-122"/>
+                <a:cs typeface="Noto Sans JP" pitchFamily="34" charset="-120"/>
               </a:rPr>
               <a:t>受け取った図面PDFをその場で照合。kintone登録は不要</a:t>
             </a:r>
@@ -9938,9 +9938,9 @@
                 <a:solidFill>
                   <a:srgbClr val="1E2761"/>
                 </a:solidFill>
-                <a:latin typeface="Yu Gothic" pitchFamily="34" charset="0"/>
-                <a:ea typeface="Yu Gothic" pitchFamily="34" charset="-122"/>
-                <a:cs typeface="Yu Gothic" pitchFamily="34" charset="-120"/>
+                <a:latin typeface="Noto Sans JP" pitchFamily="34" charset="0"/>
+                <a:ea typeface="Noto Sans JP" pitchFamily="34" charset="-122"/>
+                <a:cs typeface="Noto Sans JP" pitchFamily="34" charset="-120"/>
               </a:rPr>
               <a:t>OCR自動入力</a:t>
             </a:r>
@@ -9980,9 +9980,9 @@
                 <a:solidFill>
                   <a:srgbClr val="1A1F36"/>
                 </a:solidFill>
-                <a:latin typeface="Yu Gothic" pitchFamily="34" charset="0"/>
-                <a:ea typeface="Yu Gothic" pitchFamily="34" charset="-122"/>
-                <a:cs typeface="Yu Gothic" pitchFamily="34" charset="-120"/>
+                <a:latin typeface="Noto Sans JP" pitchFamily="34" charset="0"/>
+                <a:ea typeface="Noto Sans JP" pitchFamily="34" charset="-122"/>
+                <a:cs typeface="Noto Sans JP" pitchFamily="34" charset="-120"/>
               </a:rPr>
               <a:t>図番・品名・材質・寸法を自動抽出し、登録の手間を削減</a:t>
             </a:r>
@@ -10092,9 +10092,9 @@
                 <a:solidFill>
                   <a:srgbClr val="1E2761"/>
                 </a:solidFill>
-                <a:latin typeface="Yu Gothic" pitchFamily="34" charset="0"/>
-                <a:ea typeface="Yu Gothic" pitchFamily="34" charset="-122"/>
-                <a:cs typeface="Yu Gothic" pitchFamily="34" charset="-120"/>
+                <a:latin typeface="Noto Sans JP" pitchFamily="34" charset="0"/>
+                <a:ea typeface="Noto Sans JP" pitchFamily="34" charset="-122"/>
+                <a:cs typeface="Noto Sans JP" pitchFamily="34" charset="-120"/>
               </a:rPr>
               <a:t>管理・一括登録</a:t>
             </a:r>
@@ -10134,9 +10134,9 @@
                 <a:solidFill>
                   <a:srgbClr val="1A1F36"/>
                 </a:solidFill>
-                <a:latin typeface="Yu Gothic" pitchFamily="34" charset="0"/>
-                <a:ea typeface="Yu Gothic" pitchFamily="34" charset="-122"/>
-                <a:cs typeface="Yu Gothic" pitchFamily="34" charset="-120"/>
+                <a:latin typeface="Noto Sans JP" pitchFamily="34" charset="0"/>
+                <a:ea typeface="Noto Sans JP" pitchFamily="34" charset="-122"/>
+                <a:cs typeface="Noto Sans JP" pitchFamily="34" charset="-120"/>
               </a:rPr>
               <a:t>既存レコードをまとめて検索対象化。登録漏れも自動検知</a:t>
             </a:r>
@@ -10173,9 +10173,9 @@
                 <a:solidFill>
                   <a:srgbClr val="5A6478"/>
                 </a:solidFill>
-                <a:latin typeface="Yu Gothic" pitchFamily="34" charset="0"/>
-                <a:ea typeface="Yu Gothic" pitchFamily="34" charset="-122"/>
-                <a:cs typeface="Yu Gothic" pitchFamily="34" charset="-120"/>
+                <a:latin typeface="Noto Sans JP" pitchFamily="34" charset="0"/>
+                <a:ea typeface="Noto Sans JP" pitchFamily="34" charset="-122"/>
+                <a:cs typeface="Noto Sans JP" pitchFamily="34" charset="-120"/>
               </a:rPr>
               <a:t>4</a:t>
             </a:r>
@@ -10244,9 +10244,9 @@
                 <a:solidFill>
                   <a:srgbClr val="E8833A"/>
                 </a:solidFill>
-                <a:latin typeface="Yu Gothic" pitchFamily="34" charset="0"/>
-                <a:ea typeface="Yu Gothic" pitchFamily="34" charset="-122"/>
-                <a:cs typeface="Yu Gothic" pitchFamily="34" charset="-120"/>
+                <a:latin typeface="Noto Sans JP" pitchFamily="34" charset="0"/>
+                <a:ea typeface="Noto Sans JP" pitchFamily="34" charset="-122"/>
+                <a:cs typeface="Noto Sans JP" pitchFamily="34" charset="-120"/>
               </a:rPr>
               <a:t>機能 ①</a:t>
             </a:r>
@@ -10283,9 +10283,9 @@
                 <a:solidFill>
                   <a:srgbClr val="1E2761"/>
                 </a:solidFill>
-                <a:latin typeface="Yu Gothic" pitchFamily="34" charset="0"/>
-                <a:ea typeface="Yu Gothic" pitchFamily="34" charset="-122"/>
-                <a:cs typeface="Yu Gothic" pitchFamily="34" charset="-120"/>
+                <a:latin typeface="Noto Sans JP" pitchFamily="34" charset="0"/>
+                <a:ea typeface="Noto Sans JP" pitchFamily="34" charset="-122"/>
+                <a:cs typeface="Noto Sans JP" pitchFamily="34" charset="-120"/>
               </a:rPr>
               <a:t>類似図面検索</a:t>
             </a:r>
@@ -10329,9 +10329,9 @@
                 <a:solidFill>
                   <a:srgbClr val="1A1F36"/>
                 </a:solidFill>
-                <a:latin typeface="Yu Gothic" pitchFamily="34" charset="0"/>
-                <a:ea typeface="Yu Gothic" pitchFamily="34" charset="-122"/>
-                <a:cs typeface="Yu Gothic" pitchFamily="34" charset="-120"/>
+                <a:latin typeface="Noto Sans JP" pitchFamily="34" charset="0"/>
+                <a:ea typeface="Noto Sans JP" pitchFamily="34" charset="-122"/>
+                <a:cs typeface="Noto Sans JP" pitchFamily="34" charset="-120"/>
               </a:rPr>
               <a:t>詳細画面の「類似図面検索」ボタンから、似た過去図面をスコア順に一覧表示します。</a:t>
             </a:r>
@@ -10353,9 +10353,9 @@
                 <a:solidFill>
                   <a:srgbClr val="1A1F36"/>
                 </a:solidFill>
-                <a:latin typeface="Yu Gothic" pitchFamily="34" charset="0"/>
-                <a:ea typeface="Yu Gothic" pitchFamily="34" charset="-122"/>
-                <a:cs typeface="Yu Gothic" pitchFamily="34" charset="-120"/>
+                <a:latin typeface="Noto Sans JP" pitchFamily="34" charset="0"/>
+                <a:ea typeface="Noto Sans JP" pitchFamily="34" charset="-122"/>
+                <a:cs typeface="Noto Sans JP" pitchFamily="34" charset="-120"/>
               </a:rPr>
               <a:t>検索の確度バッジ（高／中／低）で、一目で信頼度を把握できます。</a:t>
             </a:r>
@@ -10377,9 +10377,9 @@
                 <a:solidFill>
                   <a:srgbClr val="1A1F36"/>
                 </a:solidFill>
-                <a:latin typeface="Yu Gothic" pitchFamily="34" charset="0"/>
-                <a:ea typeface="Yu Gothic" pitchFamily="34" charset="-122"/>
-                <a:cs typeface="Yu Gothic" pitchFamily="34" charset="-120"/>
+                <a:latin typeface="Noto Sans JP" pitchFamily="34" charset="0"/>
+                <a:ea typeface="Noto Sans JP" pitchFamily="34" charset="-122"/>
+                <a:cs typeface="Noto Sans JP" pitchFamily="34" charset="-120"/>
               </a:rPr>
               <a:t>一致バッジの例：図番一致・材質一致・寸法近似・外形近似 など</a:t>
             </a:r>
@@ -10401,9 +10401,9 @@
                 <a:solidFill>
                   <a:srgbClr val="1A1F36"/>
                 </a:solidFill>
-                <a:latin typeface="Yu Gothic" pitchFamily="34" charset="0"/>
-                <a:ea typeface="Yu Gothic" pitchFamily="34" charset="-122"/>
-                <a:cs typeface="Yu Gothic" pitchFamily="34" charset="-120"/>
+                <a:latin typeface="Noto Sans JP" pitchFamily="34" charset="0"/>
+                <a:ea typeface="Noto Sans JP" pitchFamily="34" charset="-122"/>
+                <a:cs typeface="Noto Sans JP" pitchFamily="34" charset="-120"/>
               </a:rPr>
               <a:t>スコア内訳を見れば「なぜ似ているか」が分かります。</a:t>
             </a:r>
@@ -10511,9 +10511,9 @@
                 <a:solidFill>
                   <a:srgbClr val="5A6478"/>
                 </a:solidFill>
-                <a:latin typeface="Yu Gothic" pitchFamily="34" charset="0"/>
-                <a:ea typeface="Yu Gothic" pitchFamily="34" charset="-122"/>
-                <a:cs typeface="Yu Gothic" pitchFamily="34" charset="-120"/>
+                <a:latin typeface="Noto Sans JP" pitchFamily="34" charset="0"/>
+                <a:ea typeface="Noto Sans JP" pitchFamily="34" charset="-122"/>
+                <a:cs typeface="Noto Sans JP" pitchFamily="34" charset="-120"/>
               </a:rPr>
               <a:t>画面イメージ（スクリーンショット差し替え）</a:t>
             </a:r>
@@ -10550,9 +10550,9 @@
                 <a:solidFill>
                   <a:srgbClr val="5A6478"/>
                 </a:solidFill>
-                <a:latin typeface="Yu Gothic" pitchFamily="34" charset="0"/>
-                <a:ea typeface="Yu Gothic" pitchFamily="34" charset="-122"/>
-                <a:cs typeface="Yu Gothic" pitchFamily="34" charset="-120"/>
+                <a:latin typeface="Noto Sans JP" pitchFamily="34" charset="0"/>
+                <a:ea typeface="Noto Sans JP" pitchFamily="34" charset="-122"/>
+                <a:cs typeface="Noto Sans JP" pitchFamily="34" charset="-120"/>
               </a:rPr>
               <a:t>5</a:t>
             </a:r>
@@ -10621,9 +10621,9 @@
                 <a:solidFill>
                   <a:srgbClr val="E8833A"/>
                 </a:solidFill>
-                <a:latin typeface="Yu Gothic" pitchFamily="34" charset="0"/>
-                <a:ea typeface="Yu Gothic" pitchFamily="34" charset="-122"/>
-                <a:cs typeface="Yu Gothic" pitchFamily="34" charset="-120"/>
+                <a:latin typeface="Noto Sans JP" pitchFamily="34" charset="0"/>
+                <a:ea typeface="Noto Sans JP" pitchFamily="34" charset="-122"/>
+                <a:cs typeface="Noto Sans JP" pitchFamily="34" charset="-120"/>
               </a:rPr>
               <a:t>機能 ②</a:t>
             </a:r>
@@ -10660,9 +10660,9 @@
                 <a:solidFill>
                   <a:srgbClr val="1E2761"/>
                 </a:solidFill>
-                <a:latin typeface="Yu Gothic" pitchFamily="34" charset="0"/>
-                <a:ea typeface="Yu Gothic" pitchFamily="34" charset="-122"/>
-                <a:cs typeface="Yu Gothic" pitchFamily="34" charset="-120"/>
+                <a:latin typeface="Noto Sans JP" pitchFamily="34" charset="0"/>
+                <a:ea typeface="Noto Sans JP" pitchFamily="34" charset="-122"/>
+                <a:cs typeface="Noto Sans JP" pitchFamily="34" charset="-120"/>
               </a:rPr>
               <a:t>アップロード即検索</a:t>
             </a:r>
@@ -10706,9 +10706,9 @@
                 <a:solidFill>
                   <a:srgbClr val="1A1F36"/>
                 </a:solidFill>
-                <a:latin typeface="Yu Gothic" pitchFamily="34" charset="0"/>
-                <a:ea typeface="Yu Gothic" pitchFamily="34" charset="-122"/>
-                <a:cs typeface="Yu Gothic" pitchFamily="34" charset="-120"/>
+                <a:latin typeface="Noto Sans JP" pitchFamily="34" charset="0"/>
+                <a:ea typeface="Noto Sans JP" pitchFamily="34" charset="-122"/>
+                <a:cs typeface="Noto Sans JP" pitchFamily="34" charset="-120"/>
               </a:rPr>
               <a:t>一覧画面の「類似検索（アップロード）」から、PDFをドラッグ&amp;ドロップするだけ。</a:t>
             </a:r>
@@ -10730,9 +10730,9 @@
                 <a:solidFill>
                   <a:srgbClr val="1A1F36"/>
                 </a:solidFill>
-                <a:latin typeface="Yu Gothic" pitchFamily="34" charset="0"/>
-                <a:ea typeface="Yu Gothic" pitchFamily="34" charset="-122"/>
-                <a:cs typeface="Yu Gothic" pitchFamily="34" charset="-120"/>
+                <a:latin typeface="Noto Sans JP" pitchFamily="34" charset="0"/>
+                <a:ea typeface="Noto Sans JP" pitchFamily="34" charset="-122"/>
+                <a:cs typeface="Noto Sans JP" pitchFamily="34" charset="-120"/>
               </a:rPr>
               <a:t>kintoneへの登録は不要。その場で検索結果が得られます。</a:t>
             </a:r>
@@ -10791,9 +10791,9 @@
                 <a:solidFill>
                   <a:srgbClr val="E8833A"/>
                 </a:solidFill>
-                <a:latin typeface="Yu Gothic" pitchFamily="34" charset="0"/>
-                <a:ea typeface="Yu Gothic" pitchFamily="34" charset="-122"/>
-                <a:cs typeface="Yu Gothic" pitchFamily="34" charset="-120"/>
+                <a:latin typeface="Noto Sans JP" pitchFamily="34" charset="0"/>
+                <a:ea typeface="Noto Sans JP" pitchFamily="34" charset="-122"/>
+                <a:cs typeface="Noto Sans JP" pitchFamily="34" charset="-120"/>
               </a:rPr>
               <a:t>ユースケース</a:t>
             </a:r>
@@ -10833,9 +10833,9 @@
                 <a:solidFill>
                   <a:srgbClr val="1A1F36"/>
                 </a:solidFill>
-                <a:latin typeface="Yu Gothic" pitchFamily="34" charset="0"/>
-                <a:ea typeface="Yu Gothic" pitchFamily="34" charset="-122"/>
-                <a:cs typeface="Yu Gothic" pitchFamily="34" charset="-120"/>
+                <a:latin typeface="Noto Sans JP" pitchFamily="34" charset="0"/>
+                <a:ea typeface="Noto Sans JP" pitchFamily="34" charset="-122"/>
+                <a:cs typeface="Noto Sans JP" pitchFamily="34" charset="-120"/>
               </a:rPr>
               <a:t>見積依頼のPDFを受領 → 過去実績を確認 → 見積根拠に</a:t>
             </a:r>
@@ -10943,9 +10943,9 @@
                 <a:solidFill>
                   <a:srgbClr val="5A6478"/>
                 </a:solidFill>
-                <a:latin typeface="Yu Gothic" pitchFamily="34" charset="0"/>
-                <a:ea typeface="Yu Gothic" pitchFamily="34" charset="-122"/>
-                <a:cs typeface="Yu Gothic" pitchFamily="34" charset="-120"/>
+                <a:latin typeface="Noto Sans JP" pitchFamily="34" charset="0"/>
+                <a:ea typeface="Noto Sans JP" pitchFamily="34" charset="-122"/>
+                <a:cs typeface="Noto Sans JP" pitchFamily="34" charset="-120"/>
               </a:rPr>
               <a:t>画面イメージ（スクリーンショット差し替え）</a:t>
             </a:r>
@@ -10982,9 +10982,9 @@
                 <a:solidFill>
                   <a:srgbClr val="5A6478"/>
                 </a:solidFill>
-                <a:latin typeface="Yu Gothic" pitchFamily="34" charset="0"/>
-                <a:ea typeface="Yu Gothic" pitchFamily="34" charset="-122"/>
-                <a:cs typeface="Yu Gothic" pitchFamily="34" charset="-120"/>
+                <a:latin typeface="Noto Sans JP" pitchFamily="34" charset="0"/>
+                <a:ea typeface="Noto Sans JP" pitchFamily="34" charset="-122"/>
+                <a:cs typeface="Noto Sans JP" pitchFamily="34" charset="-120"/>
               </a:rPr>
               <a:t>6</a:t>
             </a:r>
@@ -11053,9 +11053,9 @@
                 <a:solidFill>
                   <a:srgbClr val="E8833A"/>
                 </a:solidFill>
-                <a:latin typeface="Yu Gothic" pitchFamily="34" charset="0"/>
-                <a:ea typeface="Yu Gothic" pitchFamily="34" charset="-122"/>
-                <a:cs typeface="Yu Gothic" pitchFamily="34" charset="-120"/>
+                <a:latin typeface="Noto Sans JP" pitchFamily="34" charset="0"/>
+                <a:ea typeface="Noto Sans JP" pitchFamily="34" charset="-122"/>
+                <a:cs typeface="Noto Sans JP" pitchFamily="34" charset="-120"/>
               </a:rPr>
               <a:t>機能 ③</a:t>
             </a:r>
@@ -11092,9 +11092,9 @@
                 <a:solidFill>
                   <a:srgbClr val="1E2761"/>
                 </a:solidFill>
-                <a:latin typeface="Yu Gothic" pitchFamily="34" charset="0"/>
-                <a:ea typeface="Yu Gothic" pitchFamily="34" charset="-122"/>
-                <a:cs typeface="Yu Gothic" pitchFamily="34" charset="-120"/>
+                <a:latin typeface="Noto Sans JP" pitchFamily="34" charset="0"/>
+                <a:ea typeface="Noto Sans JP" pitchFamily="34" charset="-122"/>
+                <a:cs typeface="Noto Sans JP" pitchFamily="34" charset="-120"/>
               </a:rPr>
               <a:t>図面登録とOCR自動入力</a:t>
             </a:r>
@@ -11138,9 +11138,9 @@
                 <a:solidFill>
                   <a:srgbClr val="1A1F36"/>
                 </a:solidFill>
-                <a:latin typeface="Yu Gothic" pitchFamily="34" charset="0"/>
-                <a:ea typeface="Yu Gothic" pitchFamily="34" charset="-122"/>
-                <a:cs typeface="Yu Gothic" pitchFamily="34" charset="-120"/>
+                <a:latin typeface="Noto Sans JP" pitchFamily="34" charset="0"/>
+                <a:ea typeface="Noto Sans JP" pitchFamily="34" charset="-122"/>
+                <a:cs typeface="Noto Sans JP" pitchFamily="34" charset="-120"/>
               </a:rPr>
               <a:t>PDFをドロップすると「図面をOCR解析しています...」と表示され、自動解析が始まります。</a:t>
             </a:r>
@@ -11162,9 +11162,9 @@
                 <a:solidFill>
                   <a:srgbClr val="1A1F36"/>
                 </a:solidFill>
-                <a:latin typeface="Yu Gothic" pitchFamily="34" charset="0"/>
-                <a:ea typeface="Yu Gothic" pitchFamily="34" charset="-122"/>
-                <a:cs typeface="Yu Gothic" pitchFamily="34" charset="-120"/>
+                <a:latin typeface="Noto Sans JP" pitchFamily="34" charset="0"/>
+                <a:ea typeface="Noto Sans JP" pitchFamily="34" charset="-122"/>
+                <a:cs typeface="Noto Sans JP" pitchFamily="34" charset="-120"/>
               </a:rPr>
               <a:t>図番・品名・材質・寸法・加工方法が自動入力されます。</a:t>
             </a:r>
@@ -11186,9 +11186,9 @@
                 <a:solidFill>
                   <a:srgbClr val="1A1F36"/>
                 </a:solidFill>
-                <a:latin typeface="Yu Gothic" pitchFamily="34" charset="0"/>
-                <a:ea typeface="Yu Gothic" pitchFamily="34" charset="-122"/>
-                <a:cs typeface="Yu Gothic" pitchFamily="34" charset="-120"/>
+                <a:latin typeface="Noto Sans JP" pitchFamily="34" charset="0"/>
+                <a:ea typeface="Noto Sans JP" pitchFamily="34" charset="-122"/>
+                <a:cs typeface="Noto Sans JP" pitchFamily="34" charset="-120"/>
               </a:rPr>
               <a:t>既存値からのサジェストで表記ゆれを防止。</a:t>
             </a:r>
@@ -11210,9 +11210,9 @@
                 <a:solidFill>
                   <a:srgbClr val="1A1F36"/>
                 </a:solidFill>
-                <a:latin typeface="Yu Gothic" pitchFamily="34" charset="0"/>
-                <a:ea typeface="Yu Gothic" pitchFamily="34" charset="-122"/>
-                <a:cs typeface="Yu Gothic" pitchFamily="34" charset="-120"/>
+                <a:latin typeface="Noto Sans JP" pitchFamily="34" charset="0"/>
+                <a:ea typeface="Noto Sans JP" pitchFamily="34" charset="-122"/>
+                <a:cs typeface="Noto Sans JP" pitchFamily="34" charset="-120"/>
               </a:rPr>
               <a:t>手動タグに加え、AIによる形状タグも付与されます。</a:t>
             </a:r>
@@ -11320,9 +11320,9 @@
                 <a:solidFill>
                   <a:srgbClr val="5A6478"/>
                 </a:solidFill>
-                <a:latin typeface="Yu Gothic" pitchFamily="34" charset="0"/>
-                <a:ea typeface="Yu Gothic" pitchFamily="34" charset="-122"/>
-                <a:cs typeface="Yu Gothic" pitchFamily="34" charset="-120"/>
+                <a:latin typeface="Noto Sans JP" pitchFamily="34" charset="0"/>
+                <a:ea typeface="Noto Sans JP" pitchFamily="34" charset="-122"/>
+                <a:cs typeface="Noto Sans JP" pitchFamily="34" charset="-120"/>
               </a:rPr>
               <a:t>画面イメージ（スクリーンショット差し替え）</a:t>
             </a:r>
@@ -11359,9 +11359,9 @@
                 <a:solidFill>
                   <a:srgbClr val="5A6478"/>
                 </a:solidFill>
-                <a:latin typeface="Yu Gothic" pitchFamily="34" charset="0"/>
-                <a:ea typeface="Yu Gothic" pitchFamily="34" charset="-122"/>
-                <a:cs typeface="Yu Gothic" pitchFamily="34" charset="-120"/>
+                <a:latin typeface="Noto Sans JP" pitchFamily="34" charset="0"/>
+                <a:ea typeface="Noto Sans JP" pitchFamily="34" charset="-122"/>
+                <a:cs typeface="Noto Sans JP" pitchFamily="34" charset="-120"/>
               </a:rPr>
               <a:t>7</a:t>
             </a:r>
@@ -11430,9 +11430,9 @@
                 <a:solidFill>
                   <a:srgbClr val="E8833A"/>
                 </a:solidFill>
-                <a:latin typeface="Yu Gothic" pitchFamily="34" charset="0"/>
-                <a:ea typeface="Yu Gothic" pitchFamily="34" charset="-122"/>
-                <a:cs typeface="Yu Gothic" pitchFamily="34" charset="-120"/>
+                <a:latin typeface="Noto Sans JP" pitchFamily="34" charset="0"/>
+                <a:ea typeface="Noto Sans JP" pitchFamily="34" charset="-122"/>
+                <a:cs typeface="Noto Sans JP" pitchFamily="34" charset="-120"/>
               </a:rPr>
               <a:t>機能 ④</a:t>
             </a:r>
@@ -11469,9 +11469,9 @@
                 <a:solidFill>
                   <a:srgbClr val="1E2761"/>
                 </a:solidFill>
-                <a:latin typeface="Yu Gothic" pitchFamily="34" charset="0"/>
-                <a:ea typeface="Yu Gothic" pitchFamily="34" charset="-122"/>
-                <a:cs typeface="Yu Gothic" pitchFamily="34" charset="-120"/>
+                <a:latin typeface="Noto Sans JP" pitchFamily="34" charset="0"/>
+                <a:ea typeface="Noto Sans JP" pitchFamily="34" charset="-122"/>
+                <a:cs typeface="Noto Sans JP" pitchFamily="34" charset="-120"/>
               </a:rPr>
               <a:t>管理機能</a:t>
             </a:r>
@@ -11508,9 +11508,9 @@
                 <a:solidFill>
                   <a:srgbClr val="5A6478"/>
                 </a:solidFill>
-                <a:latin typeface="Yu Gothic" pitchFamily="34" charset="0"/>
-                <a:ea typeface="Yu Gothic" pitchFamily="34" charset="-122"/>
-                <a:cs typeface="Yu Gothic" pitchFamily="34" charset="-120"/>
+                <a:latin typeface="Noto Sans JP" pitchFamily="34" charset="0"/>
+                <a:ea typeface="Noto Sans JP" pitchFamily="34" charset="-122"/>
+                <a:cs typeface="Noto Sans JP" pitchFamily="34" charset="-120"/>
               </a:rPr>
               <a:t>一覧画面の「管理 ▾」メニューから、検索対象データの健全性を保てます。</a:t>
             </a:r>
@@ -11613,9 +11613,9 @@
                 <a:solidFill>
                   <a:srgbClr val="1E2761"/>
                 </a:solidFill>
-                <a:latin typeface="Yu Gothic" pitchFamily="34" charset="0"/>
-                <a:ea typeface="Yu Gothic" pitchFamily="34" charset="-122"/>
-                <a:cs typeface="Yu Gothic" pitchFamily="34" charset="-120"/>
+                <a:latin typeface="Noto Sans JP" pitchFamily="34" charset="0"/>
+                <a:ea typeface="Noto Sans JP" pitchFamily="34" charset="-122"/>
+                <a:cs typeface="Noto Sans JP" pitchFamily="34" charset="-120"/>
               </a:rPr>
               <a:t>インデックス状況チェック</a:t>
             </a:r>
@@ -11652,9 +11652,9 @@
                 <a:solidFill>
                   <a:srgbClr val="1A1F36"/>
                 </a:solidFill>
-                <a:latin typeface="Yu Gothic" pitchFamily="34" charset="0"/>
-                <a:ea typeface="Yu Gothic" pitchFamily="34" charset="-122"/>
-                <a:cs typeface="Yu Gothic" pitchFamily="34" charset="-120"/>
+                <a:latin typeface="Noto Sans JP" pitchFamily="34" charset="0"/>
+                <a:ea typeface="Noto Sans JP" pitchFamily="34" charset="-122"/>
+                <a:cs typeface="Noto Sans JP" pitchFamily="34" charset="-120"/>
               </a:rPr>
               <a:t>未登録・要更新・孤児データを検知し、その場で修復</a:t>
             </a:r>
@@ -11757,9 +11757,9 @@
                 <a:solidFill>
                   <a:srgbClr val="1E2761"/>
                 </a:solidFill>
-                <a:latin typeface="Yu Gothic" pitchFamily="34" charset="0"/>
-                <a:ea typeface="Yu Gothic" pitchFamily="34" charset="-122"/>
-                <a:cs typeface="Yu Gothic" pitchFamily="34" charset="-120"/>
+                <a:latin typeface="Noto Sans JP" pitchFamily="34" charset="0"/>
+                <a:ea typeface="Noto Sans JP" pitchFamily="34" charset="-122"/>
+                <a:cs typeface="Noto Sans JP" pitchFamily="34" charset="-120"/>
               </a:rPr>
               <a:t>一括図面登録</a:t>
             </a:r>
@@ -11796,9 +11796,9 @@
                 <a:solidFill>
                   <a:srgbClr val="1A1F36"/>
                 </a:solidFill>
-                <a:latin typeface="Yu Gothic" pitchFamily="34" charset="0"/>
-                <a:ea typeface="Yu Gothic" pitchFamily="34" charset="-122"/>
-                <a:cs typeface="Yu Gothic" pitchFamily="34" charset="-120"/>
+                <a:latin typeface="Noto Sans JP" pitchFamily="34" charset="0"/>
+                <a:ea typeface="Noto Sans JP" pitchFamily="34" charset="-122"/>
+                <a:cs typeface="Noto Sans JP" pitchFamily="34" charset="-120"/>
               </a:rPr>
               <a:t>既存レコードをまとめて検索対象化</a:t>
             </a:r>
@@ -11901,9 +11901,9 @@
                 <a:solidFill>
                   <a:srgbClr val="1E2761"/>
                 </a:solidFill>
-                <a:latin typeface="Yu Gothic" pitchFamily="34" charset="0"/>
-                <a:ea typeface="Yu Gothic" pitchFamily="34" charset="-122"/>
-                <a:cs typeface="Yu Gothic" pitchFamily="34" charset="-120"/>
+                <a:latin typeface="Noto Sans JP" pitchFamily="34" charset="0"/>
+                <a:ea typeface="Noto Sans JP" pitchFamily="34" charset="-122"/>
+                <a:cs typeface="Noto Sans JP" pitchFamily="34" charset="-120"/>
               </a:rPr>
               <a:t>過去図面アーカイブ取り込み</a:t>
             </a:r>
@@ -11940,9 +11940,9 @@
                 <a:solidFill>
                   <a:srgbClr val="1A1F36"/>
                 </a:solidFill>
-                <a:latin typeface="Yu Gothic" pitchFamily="34" charset="0"/>
-                <a:ea typeface="Yu Gothic" pitchFamily="34" charset="-122"/>
-                <a:cs typeface="Yu Gothic" pitchFamily="34" charset="-120"/>
+                <a:latin typeface="Noto Sans JP" pitchFamily="34" charset="0"/>
+                <a:ea typeface="Noto Sans JP" pitchFamily="34" charset="-122"/>
+                <a:cs typeface="Noto Sans JP" pitchFamily="34" charset="-120"/>
               </a:rPr>
               <a:t>kintone未登録の過去図面も検索対象に（オプション）</a:t>
             </a:r>
@@ -11979,9 +11979,9 @@
                 <a:solidFill>
                   <a:srgbClr val="5A6478"/>
                 </a:solidFill>
-                <a:latin typeface="Yu Gothic" pitchFamily="34" charset="0"/>
-                <a:ea typeface="Yu Gothic" pitchFamily="34" charset="-122"/>
-                <a:cs typeface="Yu Gothic" pitchFamily="34" charset="-120"/>
+                <a:latin typeface="Noto Sans JP" pitchFamily="34" charset="0"/>
+                <a:ea typeface="Noto Sans JP" pitchFamily="34" charset="-122"/>
+                <a:cs typeface="Noto Sans JP" pitchFamily="34" charset="-120"/>
               </a:rPr>
               <a:t>8</a:t>
             </a:r>
@@ -12050,9 +12050,9 @@
                 <a:solidFill>
                   <a:srgbClr val="1E2761"/>
                 </a:solidFill>
-                <a:latin typeface="Yu Gothic" pitchFamily="34" charset="0"/>
-                <a:ea typeface="Yu Gothic" pitchFamily="34" charset="-122"/>
-                <a:cs typeface="Yu Gothic" pitchFamily="34" charset="-120"/>
+                <a:latin typeface="Noto Sans JP" pitchFamily="34" charset="0"/>
+                <a:ea typeface="Noto Sans JP" pitchFamily="34" charset="-122"/>
+                <a:cs typeface="Noto Sans JP" pitchFamily="34" charset="-120"/>
               </a:rPr>
               <a:t>デモ：実際の画面でご覧いただきます</a:t>
             </a:r>
@@ -12111,9 +12111,9 @@
                 <a:solidFill>
                   <a:srgbClr val="FFFFFF"/>
                 </a:solidFill>
-                <a:latin typeface="Yu Gothic" pitchFamily="34" charset="0"/>
-                <a:ea typeface="Yu Gothic" pitchFamily="34" charset="-122"/>
-                <a:cs typeface="Yu Gothic" pitchFamily="34" charset="-120"/>
+                <a:latin typeface="Noto Sans JP" pitchFamily="34" charset="0"/>
+                <a:ea typeface="Noto Sans JP" pitchFamily="34" charset="-122"/>
+                <a:cs typeface="Noto Sans JP" pitchFamily="34" charset="-120"/>
               </a:rPr>
               <a:t>1. 類似検索</a:t>
             </a:r>
@@ -12150,9 +12150,9 @@
                 <a:solidFill>
                   <a:srgbClr val="E8833A"/>
                 </a:solidFill>
-                <a:latin typeface="Yu Gothic" pitchFamily="34" charset="0"/>
-                <a:ea typeface="Yu Gothic" pitchFamily="34" charset="-122"/>
-                <a:cs typeface="Yu Gothic" pitchFamily="34" charset="-120"/>
+                <a:latin typeface="Noto Sans JP" pitchFamily="34" charset="0"/>
+                <a:ea typeface="Noto Sans JP" pitchFamily="34" charset="-122"/>
+                <a:cs typeface="Noto Sans JP" pitchFamily="34" charset="-120"/>
               </a:rPr>
               <a:t>→</a:t>
             </a:r>
@@ -12211,9 +12211,9 @@
                 <a:solidFill>
                   <a:srgbClr val="FFFFFF"/>
                 </a:solidFill>
-                <a:latin typeface="Yu Gothic" pitchFamily="34" charset="0"/>
-                <a:ea typeface="Yu Gothic" pitchFamily="34" charset="-122"/>
-                <a:cs typeface="Yu Gothic" pitchFamily="34" charset="-120"/>
+                <a:latin typeface="Noto Sans JP" pitchFamily="34" charset="0"/>
+                <a:ea typeface="Noto Sans JP" pitchFamily="34" charset="-122"/>
+                <a:cs typeface="Noto Sans JP" pitchFamily="34" charset="-120"/>
               </a:rPr>
               <a:t>2. アップロード検索</a:t>
             </a:r>
@@ -12250,9 +12250,9 @@
                 <a:solidFill>
                   <a:srgbClr val="E8833A"/>
                 </a:solidFill>
-                <a:latin typeface="Yu Gothic" pitchFamily="34" charset="0"/>
-                <a:ea typeface="Yu Gothic" pitchFamily="34" charset="-122"/>
-                <a:cs typeface="Yu Gothic" pitchFamily="34" charset="-120"/>
+                <a:latin typeface="Noto Sans JP" pitchFamily="34" charset="0"/>
+                <a:ea typeface="Noto Sans JP" pitchFamily="34" charset="-122"/>
+                <a:cs typeface="Noto Sans JP" pitchFamily="34" charset="-120"/>
               </a:rPr>
               <a:t>→</a:t>
             </a:r>
@@ -12311,9 +12311,9 @@
                 <a:solidFill>
                   <a:srgbClr val="FFFFFF"/>
                 </a:solidFill>
-                <a:latin typeface="Yu Gothic" pitchFamily="34" charset="0"/>
-                <a:ea typeface="Yu Gothic" pitchFamily="34" charset="-122"/>
-                <a:cs typeface="Yu Gothic" pitchFamily="34" charset="-120"/>
+                <a:latin typeface="Noto Sans JP" pitchFamily="34" charset="0"/>
+                <a:ea typeface="Noto Sans JP" pitchFamily="34" charset="-122"/>
+                <a:cs typeface="Noto Sans JP" pitchFamily="34" charset="-120"/>
               </a:rPr>
               <a:t>3. OCR登録</a:t>
             </a:r>
@@ -12421,9 +12421,9 @@
                 <a:solidFill>
                   <a:srgbClr val="5A6478"/>
                 </a:solidFill>
-                <a:latin typeface="Yu Gothic" pitchFamily="34" charset="0"/>
-                <a:ea typeface="Yu Gothic" pitchFamily="34" charset="-122"/>
-                <a:cs typeface="Yu Gothic" pitchFamily="34" charset="-120"/>
+                <a:latin typeface="Noto Sans JP" pitchFamily="34" charset="0"/>
+                <a:ea typeface="Noto Sans JP" pitchFamily="34" charset="-122"/>
+                <a:cs typeface="Noto Sans JP" pitchFamily="34" charset="-120"/>
               </a:rPr>
               <a:t>画面イメージ（スクリーンショット差し替え／実機デモ）</a:t>
             </a:r>
@@ -12460,9 +12460,9 @@
                 <a:solidFill>
                   <a:srgbClr val="5A6478"/>
                 </a:solidFill>
-                <a:latin typeface="Yu Gothic" pitchFamily="34" charset="0"/>
-                <a:ea typeface="Yu Gothic" pitchFamily="34" charset="-122"/>
-                <a:cs typeface="Yu Gothic" pitchFamily="34" charset="-120"/>
+                <a:latin typeface="Noto Sans JP" pitchFamily="34" charset="0"/>
+                <a:ea typeface="Noto Sans JP" pitchFamily="34" charset="-122"/>
+                <a:cs typeface="Noto Sans JP" pitchFamily="34" charset="-120"/>
               </a:rPr>
               <a:t>9</a:t>
             </a:r>
